--- a/assets/TCS302/Unit-1/Lecture2_Data_Structure_Operations_ADT_Teaching_Style.pptx
+++ b/assets/TCS302/Unit-1/Lecture2_Data_Structure_Operations_ADT_Teaching_Style.pptx
@@ -5,7 +5,7 @@
     <p:sldMasterId id="2147483648" r:id="rId1"/>
   </p:sldMasterIdLst>
   <p:notesMasterIdLst>
-    <p:notesMasterId r:id="rId18"/>
+    <p:notesMasterId r:id="rId16"/>
   </p:notesMasterIdLst>
   <p:sldIdLst>
     <p:sldId id="256" r:id="rId2"/>
@@ -22,8 +22,6 @@
     <p:sldId id="267" r:id="rId13"/>
     <p:sldId id="268" r:id="rId14"/>
     <p:sldId id="269" r:id="rId15"/>
-    <p:sldId id="270" r:id="rId16"/>
-    <p:sldId id="271" r:id="rId17"/>
   </p:sldIdLst>
   <p:sldSz cx="12192000" cy="6858000"/>
   <p:notesSz cx="6858000" cy="12192000"/>
@@ -1047,180 +1045,6 @@
 </p:notes>
 </file>
 
-<file path=ppt/notesSlides/notesSlide15.xml><?xml version="1.0" encoding="utf-8"?>
-<p:notes xmlns:a="http://schemas.openxmlformats.org/drawingml/2006/main" xmlns:r="http://schemas.openxmlformats.org/officeDocument/2006/relationships" xmlns:p="http://schemas.openxmlformats.org/presentationml/2006/main">
-  <p:cSld>
-    <p:spTree>
-      <p:nvGrpSpPr>
-        <p:cNvPr id="1" name=""/>
-        <p:cNvGrpSpPr/>
-        <p:nvPr/>
-      </p:nvGrpSpPr>
-      <p:grpSpPr>
-        <a:xfrm>
-          <a:off x="0" y="0"/>
-          <a:ext cx="0" cy="0"/>
-          <a:chOff x="0" y="0"/>
-          <a:chExt cx="0" cy="0"/>
-        </a:xfrm>
-      </p:grpSpPr>
-      <p:sp>
-        <p:nvSpPr>
-          <p:cNvPr id="2" name="Slide Image Placeholder 1"/>
-          <p:cNvSpPr>
-            <a:spLocks noGrp="1" noRot="1" noChangeAspect="1"/>
-          </p:cNvSpPr>
-          <p:nvPr>
-            <p:ph type="sldImg"/>
-          </p:nvPr>
-        </p:nvSpPr>
-        <p:spPr/>
-      </p:sp>
-      <p:sp>
-        <p:nvSpPr>
-          <p:cNvPr id="3" name="Notes Placeholder 2"/>
-          <p:cNvSpPr>
-            <a:spLocks noGrp="1"/>
-          </p:cNvSpPr>
-          <p:nvPr>
-            <p:ph type="body" idx="1"/>
-          </p:nvPr>
-        </p:nvSpPr>
-        <p:spPr/>
-        <p:txBody>
-          <a:bodyPr/>
-          <a:lstStyle/>
-          <a:p>
-            <a:r>
-              <a:rPr lang="en-US" dirty="0"/>
-              <a:t>This activity reinforces ADT design: data, operations and rules.</a:t>
-            </a:r>
-          </a:p>
-        </p:txBody>
-      </p:sp>
-      <p:sp>
-        <p:nvSpPr>
-          <p:cNvPr id="4" name="Slide Number Placeholder 3"/>
-          <p:cNvSpPr>
-            <a:spLocks noGrp="1"/>
-          </p:cNvSpPr>
-          <p:nvPr>
-            <p:ph type="sldNum" sz="quarter" idx="10"/>
-          </p:nvPr>
-        </p:nvSpPr>
-        <p:spPr/>
-        <p:txBody>
-          <a:bodyPr/>
-          <a:lstStyle/>
-          <a:p>
-            <a:fld id="{F7021451-1387-4CA6-816F-3879F97B5CBC}" type="slidenum">
-              <a:rPr lang="en-US"/>
-              <a:t>15</a:t>
-            </a:fld>
-            <a:endParaRPr lang="en-US"/>
-          </a:p>
-        </p:txBody>
-      </p:sp>
-    </p:spTree>
-    <p:extLst>
-      <p:ext uri="{BB962C8B-B14F-4D97-AF65-F5344CB8AC3E}">
-        <p14:creationId xmlns:p14="http://schemas.microsoft.com/office/powerpoint/2010/main" val="1024086991"/>
-      </p:ext>
-    </p:extLst>
-  </p:cSld>
-  <p:clrMapOvr>
-    <a:masterClrMapping/>
-  </p:clrMapOvr>
-</p:notes>
-</file>
-
-<file path=ppt/notesSlides/notesSlide16.xml><?xml version="1.0" encoding="utf-8"?>
-<p:notes xmlns:a="http://schemas.openxmlformats.org/drawingml/2006/main" xmlns:r="http://schemas.openxmlformats.org/officeDocument/2006/relationships" xmlns:p="http://schemas.openxmlformats.org/presentationml/2006/main">
-  <p:cSld>
-    <p:spTree>
-      <p:nvGrpSpPr>
-        <p:cNvPr id="1" name=""/>
-        <p:cNvGrpSpPr/>
-        <p:nvPr/>
-      </p:nvGrpSpPr>
-      <p:grpSpPr>
-        <a:xfrm>
-          <a:off x="0" y="0"/>
-          <a:ext cx="0" cy="0"/>
-          <a:chOff x="0" y="0"/>
-          <a:chExt cx="0" cy="0"/>
-        </a:xfrm>
-      </p:grpSpPr>
-      <p:sp>
-        <p:nvSpPr>
-          <p:cNvPr id="2" name="Slide Image Placeholder 1"/>
-          <p:cNvSpPr>
-            <a:spLocks noGrp="1" noRot="1" noChangeAspect="1"/>
-          </p:cNvSpPr>
-          <p:nvPr>
-            <p:ph type="sldImg"/>
-          </p:nvPr>
-        </p:nvSpPr>
-        <p:spPr/>
-      </p:sp>
-      <p:sp>
-        <p:nvSpPr>
-          <p:cNvPr id="3" name="Notes Placeholder 2"/>
-          <p:cNvSpPr>
-            <a:spLocks noGrp="1"/>
-          </p:cNvSpPr>
-          <p:nvPr>
-            <p:ph type="body" idx="1"/>
-          </p:nvPr>
-        </p:nvSpPr>
-        <p:spPr/>
-        <p:txBody>
-          <a:bodyPr/>
-          <a:lstStyle/>
-          <a:p>
-            <a:r>
-              <a:rPr lang="en-US" dirty="0"/>
-              <a:t>End by previewing Lecture 3.</a:t>
-            </a:r>
-          </a:p>
-        </p:txBody>
-      </p:sp>
-      <p:sp>
-        <p:nvSpPr>
-          <p:cNvPr id="4" name="Slide Number Placeholder 3"/>
-          <p:cNvSpPr>
-            <a:spLocks noGrp="1"/>
-          </p:cNvSpPr>
-          <p:nvPr>
-            <p:ph type="sldNum" sz="quarter" idx="10"/>
-          </p:nvPr>
-        </p:nvSpPr>
-        <p:spPr/>
-        <p:txBody>
-          <a:bodyPr/>
-          <a:lstStyle/>
-          <a:p>
-            <a:fld id="{F7021451-1387-4CA6-816F-3879F97B5CBC}" type="slidenum">
-              <a:rPr lang="en-US"/>
-              <a:t>16</a:t>
-            </a:fld>
-            <a:endParaRPr lang="en-US"/>
-          </a:p>
-        </p:txBody>
-      </p:sp>
-    </p:spTree>
-    <p:extLst>
-      <p:ext uri="{BB962C8B-B14F-4D97-AF65-F5344CB8AC3E}">
-        <p14:creationId xmlns:p14="http://schemas.microsoft.com/office/powerpoint/2010/main" val="1024086991"/>
-      </p:ext>
-    </p:extLst>
-  </p:cSld>
-  <p:clrMapOvr>
-    <a:masterClrMapping/>
-  </p:clrMapOvr>
-</p:notes>
-</file>
-
 <file path=ppt/notesSlides/notesSlide2.xml><?xml version="1.0" encoding="utf-8"?>
 <p:notes xmlns:a="http://schemas.openxmlformats.org/drawingml/2006/main" xmlns:r="http://schemas.openxmlformats.org/officeDocument/2006/relationships" xmlns:p="http://schemas.openxmlformats.org/presentationml/2006/main">
   <p:cSld>
@@ -2586,63 +2410,7 @@
                 <a:ea typeface="Times New Roman" pitchFamily="34" charset="-122"/>
                 <a:cs typeface="Times New Roman" pitchFamily="34" charset="-120"/>
               </a:rPr>
-              <a:t>Manoj Kaushik</a:t>
-            </a:r>
-            <a:endParaRPr lang="en-US" sz="1800" dirty="0"/>
-          </a:p>
-          <a:p>
-            <a:pPr marL="0" indent="0">
-              <a:buNone/>
-            </a:pPr>
-            <a:r>
-              <a:rPr lang="en-US" sz="1800" dirty="0">
-                <a:solidFill>
-                  <a:srgbClr val="475467"/>
-                </a:solidFill>
-                <a:latin typeface="Times New Roman" pitchFamily="34" charset="0"/>
-                <a:ea typeface="Times New Roman" pitchFamily="34" charset="-122"/>
-                <a:cs typeface="Times New Roman" pitchFamily="34" charset="-120"/>
-              </a:rPr>
-              <a:t>Department of Computer Science and Engineering</a:t>
-            </a:r>
-            <a:endParaRPr lang="en-US" sz="1800" dirty="0"/>
-          </a:p>
-        </p:txBody>
-      </p:sp>
-      <p:sp>
-        <p:nvSpPr>
-          <p:cNvPr id="13" name="Text 5"/>
-          <p:cNvSpPr/>
-          <p:nvPr/>
-        </p:nvSpPr>
-        <p:spPr>
-          <a:xfrm>
-            <a:off x="731520" y="5623560"/>
-            <a:ext cx="4846320" cy="502920"/>
-          </a:xfrm>
-          <a:prstGeom prst="rect">
-            <a:avLst/>
-          </a:prstGeom>
-          <a:noFill/>
-          <a:ln/>
-        </p:spPr>
-        <p:txBody>
-          <a:bodyPr wrap="square" lIns="0" tIns="0" rIns="0" bIns="0" rtlCol="0" anchor="ctr"/>
-          <a:lstStyle/>
-          <a:p>
-            <a:pPr marL="0" indent="0">
-              <a:buNone/>
-            </a:pPr>
-            <a:r>
-              <a:rPr lang="en-US" sz="1800" dirty="0">
-                <a:solidFill>
-                  <a:srgbClr val="475467"/>
-                </a:solidFill>
-                <a:latin typeface="Times New Roman" pitchFamily="34" charset="0"/>
-                <a:ea typeface="Times New Roman" pitchFamily="34" charset="-122"/>
-                <a:cs typeface="Times New Roman" pitchFamily="34" charset="-120"/>
-              </a:rPr>
-              <a:t>Manoj Kaushik</a:t>
+              <a:t>Mr. Manoj Kaushik</a:t>
             </a:r>
             <a:endParaRPr lang="en-US" sz="1800" dirty="0"/>
           </a:p>
@@ -3110,47 +2878,6 @@
           </a:p>
         </p:txBody>
       </p:sp>
-      <p:sp>
-        <p:nvSpPr>
-          <p:cNvPr id="12" name="Text 9"/>
-          <p:cNvSpPr/>
-          <p:nvPr/>
-        </p:nvSpPr>
-        <p:spPr>
-          <a:xfrm>
-            <a:off x="457200" y="6528816"/>
-            <a:ext cx="11247120" cy="228600"/>
-          </a:xfrm>
-          <a:prstGeom prst="rect">
-            <a:avLst/>
-          </a:prstGeom>
-          <a:noFill/>
-          <a:ln/>
-        </p:spPr>
-        <p:txBody>
-          <a:bodyPr wrap="square" lIns="0" tIns="0" rIns="0" bIns="0" rtlCol="0" anchor="ctr">
-            <a:normAutofit lnSpcReduction="10000"/>
-          </a:bodyPr>
-          <a:lstStyle/>
-          <a:p>
-            <a:pPr marL="0" indent="0">
-              <a:buNone/>
-            </a:pPr>
-            <a:r>
-              <a:rPr lang="en-US" sz="1600" i="1" dirty="0">
-                <a:solidFill>
-                  <a:srgbClr val="475467"/>
-                </a:solidFill>
-                <a:latin typeface="Times New Roman" pitchFamily="34" charset="0"/>
-                <a:ea typeface="Times New Roman" pitchFamily="34" charset="-122"/>
-                <a:cs typeface="Times New Roman" pitchFamily="34" charset="-120"/>
-              </a:rPr>
-              <a:t>Teaching cue: Use the black-box analogy slowly.</a:t>
-            </a:r>
-            <a:endParaRPr lang="en-US" sz="1600" dirty="0"/>
-          </a:p>
-        </p:txBody>
-      </p:sp>
     </p:spTree>
   </p:cSld>
   <p:clrMapOvr>
@@ -3717,47 +3444,6 @@
           </a:p>
         </p:txBody>
       </p:sp>
-      <p:sp>
-        <p:nvSpPr>
-          <p:cNvPr id="15" name="Text 13"/>
-          <p:cNvSpPr/>
-          <p:nvPr/>
-        </p:nvSpPr>
-        <p:spPr>
-          <a:xfrm>
-            <a:off x="457200" y="6528816"/>
-            <a:ext cx="11247120" cy="228600"/>
-          </a:xfrm>
-          <a:prstGeom prst="rect">
-            <a:avLst/>
-          </a:prstGeom>
-          <a:noFill/>
-          <a:ln/>
-        </p:spPr>
-        <p:txBody>
-          <a:bodyPr wrap="square" lIns="0" tIns="0" rIns="0" bIns="0" rtlCol="0" anchor="ctr">
-            <a:normAutofit lnSpcReduction="10000"/>
-          </a:bodyPr>
-          <a:lstStyle/>
-          <a:p>
-            <a:pPr marL="0" indent="0">
-              <a:buNone/>
-            </a:pPr>
-            <a:r>
-              <a:rPr lang="en-US" sz="1600" i="1" dirty="0">
-                <a:solidFill>
-                  <a:srgbClr val="475467"/>
-                </a:solidFill>
-                <a:latin typeface="Times New Roman" pitchFamily="34" charset="0"/>
-                <a:ea typeface="Times New Roman" pitchFamily="34" charset="-122"/>
-                <a:cs typeface="Times New Roman" pitchFamily="34" charset="-120"/>
-              </a:rPr>
-              <a:t>Teaching cue: Ask students to repeat the three parts: data, operations, rules.</a:t>
-            </a:r>
-            <a:endParaRPr lang="en-US" sz="1600" dirty="0"/>
-          </a:p>
-        </p:txBody>
-      </p:sp>
     </p:spTree>
   </p:cSld>
   <p:clrMapOvr>
@@ -4652,47 +4338,6 @@
       </p:sp>
       <p:sp>
         <p:nvSpPr>
-          <p:cNvPr id="23" name="Text 21"/>
-          <p:cNvSpPr/>
-          <p:nvPr/>
-        </p:nvSpPr>
-        <p:spPr>
-          <a:xfrm>
-            <a:off x="457200" y="6528816"/>
-            <a:ext cx="11247120" cy="228600"/>
-          </a:xfrm>
-          <a:prstGeom prst="rect">
-            <a:avLst/>
-          </a:prstGeom>
-          <a:noFill/>
-          <a:ln/>
-        </p:spPr>
-        <p:txBody>
-          <a:bodyPr wrap="square" lIns="0" tIns="0" rIns="0" bIns="0" rtlCol="0" anchor="ctr">
-            <a:normAutofit lnSpcReduction="10000"/>
-          </a:bodyPr>
-          <a:lstStyle/>
-          <a:p>
-            <a:pPr marL="0" indent="0">
-              <a:buNone/>
-            </a:pPr>
-            <a:r>
-              <a:rPr lang="en-US" sz="1600" i="1" dirty="0">
-                <a:solidFill>
-                  <a:srgbClr val="475467"/>
-                </a:solidFill>
-                <a:latin typeface="Times New Roman" pitchFamily="34" charset="0"/>
-                <a:ea typeface="Times New Roman" pitchFamily="34" charset="-122"/>
-                <a:cs typeface="Times New Roman" pitchFamily="34" charset="-120"/>
-              </a:rPr>
-              <a:t>Teaching cue: Demonstrate using a pile of notebooks.</a:t>
-            </a:r>
-            <a:endParaRPr lang="en-US" sz="1600" dirty="0"/>
-          </a:p>
-        </p:txBody>
-      </p:sp>
-      <p:sp>
-        <p:nvSpPr>
           <p:cNvPr id="28" name="Shape 20"/>
           <p:cNvSpPr/>
           <p:nvPr/>
@@ -4718,47 +4363,6 @@
           <a:lstStyle/>
           <a:p>
             <a:endParaRPr lang="en-IN"/>
-          </a:p>
-        </p:txBody>
-      </p:sp>
-      <p:sp>
-        <p:nvSpPr>
-          <p:cNvPr id="29" name="Text 21"/>
-          <p:cNvSpPr/>
-          <p:nvPr/>
-        </p:nvSpPr>
-        <p:spPr>
-          <a:xfrm>
-            <a:off x="457200" y="6528816"/>
-            <a:ext cx="11247120" cy="228600"/>
-          </a:xfrm>
-          <a:prstGeom prst="rect">
-            <a:avLst/>
-          </a:prstGeom>
-          <a:noFill/>
-          <a:ln/>
-        </p:spPr>
-        <p:txBody>
-          <a:bodyPr wrap="square" lIns="0" tIns="0" rIns="0" bIns="0" rtlCol="0" anchor="ctr">
-            <a:normAutofit lnSpcReduction="10000"/>
-          </a:bodyPr>
-          <a:lstStyle/>
-          <a:p>
-            <a:pPr marL="0" indent="0">
-              <a:buNone/>
-            </a:pPr>
-            <a:r>
-              <a:rPr lang="en-US" sz="1600" i="1" dirty="0">
-                <a:solidFill>
-                  <a:srgbClr val="475467"/>
-                </a:solidFill>
-                <a:latin typeface="Times New Roman" pitchFamily="34" charset="0"/>
-                <a:ea typeface="Times New Roman" pitchFamily="34" charset="-122"/>
-                <a:cs typeface="Times New Roman" pitchFamily="34" charset="-120"/>
-              </a:rPr>
-              <a:t>Teaching cue: Demonstrate using a pile of notebooks.</a:t>
-            </a:r>
-            <a:endParaRPr lang="en-US" sz="1600" dirty="0"/>
           </a:p>
         </p:txBody>
       </p:sp>
@@ -5520,47 +5124,6 @@
       </p:sp>
       <p:sp>
         <p:nvSpPr>
-          <p:cNvPr id="20" name="Text 18"/>
-          <p:cNvSpPr/>
-          <p:nvPr/>
-        </p:nvSpPr>
-        <p:spPr>
-          <a:xfrm>
-            <a:off x="457200" y="6528816"/>
-            <a:ext cx="11247120" cy="228600"/>
-          </a:xfrm>
-          <a:prstGeom prst="rect">
-            <a:avLst/>
-          </a:prstGeom>
-          <a:noFill/>
-          <a:ln/>
-        </p:spPr>
-        <p:txBody>
-          <a:bodyPr wrap="square" lIns="0" tIns="0" rIns="0" bIns="0" rtlCol="0" anchor="ctr">
-            <a:normAutofit lnSpcReduction="10000"/>
-          </a:bodyPr>
-          <a:lstStyle/>
-          <a:p>
-            <a:pPr marL="0" indent="0">
-              <a:buNone/>
-            </a:pPr>
-            <a:r>
-              <a:rPr lang="en-US" sz="1600" i="1" dirty="0">
-                <a:solidFill>
-                  <a:srgbClr val="475467"/>
-                </a:solidFill>
-                <a:latin typeface="Times New Roman" pitchFamily="34" charset="0"/>
-                <a:ea typeface="Times New Roman" pitchFamily="34" charset="-122"/>
-                <a:cs typeface="Times New Roman" pitchFamily="34" charset="-120"/>
-              </a:rPr>
-              <a:t>Teaching cue: Say: the user calls pop(), but does not ask how memory is arranged.</a:t>
-            </a:r>
-            <a:endParaRPr lang="en-US" sz="1600" dirty="0"/>
-          </a:p>
-        </p:txBody>
-      </p:sp>
-      <p:sp>
-        <p:nvSpPr>
           <p:cNvPr id="31" name="Text 11"/>
           <p:cNvSpPr/>
           <p:nvPr/>
@@ -5826,47 +5389,6 @@
           <a:lstStyle/>
           <a:p>
             <a:endParaRPr lang="en-IN"/>
-          </a:p>
-        </p:txBody>
-      </p:sp>
-      <p:sp>
-        <p:nvSpPr>
-          <p:cNvPr id="38" name="Text 18"/>
-          <p:cNvSpPr/>
-          <p:nvPr/>
-        </p:nvSpPr>
-        <p:spPr>
-          <a:xfrm>
-            <a:off x="457200" y="6528816"/>
-            <a:ext cx="11247120" cy="228600"/>
-          </a:xfrm>
-          <a:prstGeom prst="rect">
-            <a:avLst/>
-          </a:prstGeom>
-          <a:noFill/>
-          <a:ln/>
-        </p:spPr>
-        <p:txBody>
-          <a:bodyPr wrap="square" lIns="0" tIns="0" rIns="0" bIns="0" rtlCol="0" anchor="ctr">
-            <a:normAutofit lnSpcReduction="10000"/>
-          </a:bodyPr>
-          <a:lstStyle/>
-          <a:p>
-            <a:pPr marL="0" indent="0">
-              <a:buNone/>
-            </a:pPr>
-            <a:r>
-              <a:rPr lang="en-US" sz="1600" i="1" dirty="0">
-                <a:solidFill>
-                  <a:srgbClr val="475467"/>
-                </a:solidFill>
-                <a:latin typeface="Times New Roman" pitchFamily="34" charset="0"/>
-                <a:ea typeface="Times New Roman" pitchFamily="34" charset="-122"/>
-                <a:cs typeface="Times New Roman" pitchFamily="34" charset="-120"/>
-              </a:rPr>
-              <a:t>Teaching cue: Say: the user calls pop(), but does not ask how memory is arranged.</a:t>
-            </a:r>
-            <a:endParaRPr lang="en-US" sz="1600" dirty="0"/>
           </a:p>
         </p:txBody>
       </p:sp>
@@ -6437,1278 +5959,6 @@
           </a:p>
         </p:txBody>
       </p:sp>
-      <p:sp>
-        <p:nvSpPr>
-          <p:cNvPr id="13" name="Text 11"/>
-          <p:cNvSpPr/>
-          <p:nvPr/>
-        </p:nvSpPr>
-        <p:spPr>
-          <a:xfrm>
-            <a:off x="457200" y="6528816"/>
-            <a:ext cx="11247120" cy="228600"/>
-          </a:xfrm>
-          <a:prstGeom prst="rect">
-            <a:avLst/>
-          </a:prstGeom>
-          <a:noFill/>
-          <a:ln/>
-        </p:spPr>
-        <p:txBody>
-          <a:bodyPr wrap="square" lIns="0" tIns="0" rIns="0" bIns="0" rtlCol="0" anchor="ctr">
-            <a:normAutofit lnSpcReduction="10000"/>
-          </a:bodyPr>
-          <a:lstStyle/>
-          <a:p>
-            <a:pPr marL="0" indent="0">
-              <a:buNone/>
-            </a:pPr>
-            <a:r>
-              <a:rPr lang="en-US" sz="1600" i="1" dirty="0">
-                <a:solidFill>
-                  <a:srgbClr val="475467"/>
-                </a:solidFill>
-                <a:latin typeface="Times New Roman" pitchFamily="34" charset="0"/>
-                <a:ea typeface="Times New Roman" pitchFamily="34" charset="-122"/>
-                <a:cs typeface="Times New Roman" pitchFamily="34" charset="-120"/>
-              </a:rPr>
-              <a:t>Teaching cue: Explain Stack *s as access to the actual stack object.</a:t>
-            </a:r>
-            <a:endParaRPr lang="en-US" sz="1600" dirty="0"/>
-          </a:p>
-        </p:txBody>
-      </p:sp>
-    </p:spTree>
-  </p:cSld>
-  <p:clrMapOvr>
-    <a:masterClrMapping/>
-  </p:clrMapOvr>
-</p:sld>
-</file>
-
-<file path=ppt/slides/slide15.xml><?xml version="1.0" encoding="utf-8"?>
-<p:sld xmlns:a="http://schemas.openxmlformats.org/drawingml/2006/main" xmlns:r="http://schemas.openxmlformats.org/officeDocument/2006/relationships" xmlns:p="http://schemas.openxmlformats.org/presentationml/2006/main">
-  <p:cSld name="Slide 15">
-    <p:spTree>
-      <p:nvGrpSpPr>
-        <p:cNvPr id="1" name=""/>
-        <p:cNvGrpSpPr/>
-        <p:nvPr/>
-      </p:nvGrpSpPr>
-      <p:grpSpPr>
-        <a:xfrm>
-          <a:off x="0" y="0"/>
-          <a:ext cx="0" cy="0"/>
-          <a:chOff x="0" y="0"/>
-          <a:chExt cx="0" cy="0"/>
-        </a:xfrm>
-      </p:grpSpPr>
-      <p:sp>
-        <p:nvSpPr>
-          <p:cNvPr id="2" name="Shape 0"/>
-          <p:cNvSpPr/>
-          <p:nvPr/>
-        </p:nvSpPr>
-        <p:spPr>
-          <a:xfrm>
-            <a:off x="0" y="0"/>
-            <a:ext cx="12191695" cy="457200"/>
-          </a:xfrm>
-          <a:prstGeom prst="rect">
-            <a:avLst/>
-          </a:prstGeom>
-          <a:solidFill>
-            <a:srgbClr val="0B1F35"/>
-          </a:solidFill>
-          <a:ln w="12700">
-            <a:solidFill>
-              <a:srgbClr val="0B1F35">
-                <a:alpha val="0"/>
-              </a:srgbClr>
-            </a:solidFill>
-            <a:prstDash val="solid"/>
-          </a:ln>
-        </p:spPr>
-        <p:txBody>
-          <a:bodyPr/>
-          <a:lstStyle/>
-          <a:p>
-            <a:endParaRPr lang="en-IN"/>
-          </a:p>
-        </p:txBody>
-      </p:sp>
-      <p:sp>
-        <p:nvSpPr>
-          <p:cNvPr id="3" name="Text 1"/>
-          <p:cNvSpPr/>
-          <p:nvPr/>
-        </p:nvSpPr>
-        <p:spPr>
-          <a:xfrm>
-            <a:off x="228600" y="100584"/>
-            <a:ext cx="4754880" cy="228600"/>
-          </a:xfrm>
-          <a:prstGeom prst="rect">
-            <a:avLst/>
-          </a:prstGeom>
-          <a:noFill/>
-          <a:ln/>
-        </p:spPr>
-        <p:txBody>
-          <a:bodyPr wrap="square" lIns="0" tIns="0" rIns="0" bIns="0" rtlCol="0" anchor="ctr"/>
-          <a:lstStyle/>
-          <a:p>
-            <a:pPr marL="0" indent="0">
-              <a:buNone/>
-            </a:pPr>
-            <a:r>
-              <a:rPr lang="en-US" sz="1600" b="1" dirty="0">
-                <a:solidFill>
-                  <a:srgbClr val="FFFFFF"/>
-                </a:solidFill>
-                <a:latin typeface="Times New Roman" pitchFamily="34" charset="0"/>
-                <a:ea typeface="Times New Roman" pitchFamily="34" charset="-122"/>
-                <a:cs typeface="Times New Roman" pitchFamily="34" charset="-120"/>
-              </a:rPr>
-              <a:t>TCS302: Data Structures with C</a:t>
-            </a:r>
-            <a:endParaRPr lang="en-US" sz="1600" dirty="0"/>
-          </a:p>
-        </p:txBody>
-      </p:sp>
-      <p:sp>
-        <p:nvSpPr>
-          <p:cNvPr id="4" name="Text 2"/>
-          <p:cNvSpPr/>
-          <p:nvPr/>
-        </p:nvSpPr>
-        <p:spPr>
-          <a:xfrm>
-            <a:off x="8686800" y="100584"/>
-            <a:ext cx="3246120" cy="228600"/>
-          </a:xfrm>
-          <a:prstGeom prst="rect">
-            <a:avLst/>
-          </a:prstGeom>
-          <a:noFill/>
-          <a:ln/>
-        </p:spPr>
-        <p:txBody>
-          <a:bodyPr wrap="square" lIns="0" tIns="0" rIns="0" bIns="0" rtlCol="0" anchor="ctr"/>
-          <a:lstStyle/>
-          <a:p>
-            <a:pPr marL="0" indent="0" algn="r">
-              <a:buNone/>
-            </a:pPr>
-            <a:r>
-              <a:rPr lang="en-US" sz="1600" b="1" dirty="0">
-                <a:solidFill>
-                  <a:srgbClr val="FFFFFF"/>
-                </a:solidFill>
-                <a:latin typeface="Times New Roman" pitchFamily="34" charset="0"/>
-                <a:ea typeface="Times New Roman" pitchFamily="34" charset="-122"/>
-                <a:cs typeface="Times New Roman" pitchFamily="34" charset="-120"/>
-              </a:rPr>
-              <a:t>Unit 1 | Lecture 2</a:t>
-            </a:r>
-            <a:endParaRPr lang="en-US" sz="1600" dirty="0"/>
-          </a:p>
-        </p:txBody>
-      </p:sp>
-      <p:sp>
-        <p:nvSpPr>
-          <p:cNvPr id="5" name="Text 3"/>
-          <p:cNvSpPr/>
-          <p:nvPr/>
-        </p:nvSpPr>
-        <p:spPr>
-          <a:xfrm>
-            <a:off x="502920" y="713232"/>
-            <a:ext cx="11155680" cy="438912"/>
-          </a:xfrm>
-          <a:prstGeom prst="rect">
-            <a:avLst/>
-          </a:prstGeom>
-          <a:noFill/>
-          <a:ln/>
-        </p:spPr>
-        <p:txBody>
-          <a:bodyPr wrap="square" lIns="0" tIns="0" rIns="0" bIns="0" rtlCol="0" anchor="ctr">
-            <a:normAutofit lnSpcReduction="10000"/>
-          </a:bodyPr>
-          <a:lstStyle/>
-          <a:p>
-            <a:pPr marL="0" indent="0">
-              <a:buNone/>
-            </a:pPr>
-            <a:r>
-              <a:rPr lang="en-US" sz="3200" b="1" dirty="0">
-                <a:solidFill>
-                  <a:srgbClr val="0B1F35"/>
-                </a:solidFill>
-                <a:latin typeface="Times New Roman" pitchFamily="34" charset="0"/>
-                <a:ea typeface="Times New Roman" pitchFamily="34" charset="-122"/>
-                <a:cs typeface="Times New Roman" pitchFamily="34" charset="-120"/>
-              </a:rPr>
-              <a:t>Mini Classroom Activity</a:t>
-            </a:r>
-            <a:endParaRPr lang="en-US" sz="3200" dirty="0"/>
-          </a:p>
-        </p:txBody>
-      </p:sp>
-      <p:sp>
-        <p:nvSpPr>
-          <p:cNvPr id="6" name="Text 4"/>
-          <p:cNvSpPr/>
-          <p:nvPr/>
-        </p:nvSpPr>
-        <p:spPr>
-          <a:xfrm>
-            <a:off x="530352" y="1170432"/>
-            <a:ext cx="10972800" cy="320040"/>
-          </a:xfrm>
-          <a:prstGeom prst="rect">
-            <a:avLst/>
-          </a:prstGeom>
-          <a:noFill/>
-          <a:ln/>
-        </p:spPr>
-        <p:txBody>
-          <a:bodyPr wrap="square" lIns="0" tIns="0" rIns="0" bIns="0" rtlCol="0" anchor="ctr">
-            <a:normAutofit/>
-          </a:bodyPr>
-          <a:lstStyle/>
-          <a:p>
-            <a:pPr marL="0" indent="0">
-              <a:buNone/>
-            </a:pPr>
-            <a:r>
-              <a:rPr lang="en-US" sz="2000" dirty="0">
-                <a:solidFill>
-                  <a:srgbClr val="475467"/>
-                </a:solidFill>
-                <a:latin typeface="Times New Roman" pitchFamily="34" charset="0"/>
-                <a:ea typeface="Times New Roman" pitchFamily="34" charset="-122"/>
-                <a:cs typeface="Times New Roman" pitchFamily="34" charset="-120"/>
-              </a:rPr>
-              <a:t>Design a simple LibraryBook ADT in pairs.</a:t>
-            </a:r>
-            <a:endParaRPr lang="en-US" sz="2000" dirty="0"/>
-          </a:p>
-        </p:txBody>
-      </p:sp>
-      <p:sp>
-        <p:nvSpPr>
-          <p:cNvPr id="7" name="Shape 5"/>
-          <p:cNvSpPr/>
-          <p:nvPr/>
-        </p:nvSpPr>
-        <p:spPr>
-          <a:xfrm>
-            <a:off x="845820" y="2176272"/>
-            <a:ext cx="10469880" cy="685800"/>
-          </a:xfrm>
-          <a:prstGeom prst="roundRect">
-            <a:avLst>
-              <a:gd name="adj" fmla="val 8000"/>
-            </a:avLst>
-          </a:prstGeom>
-          <a:solidFill>
-            <a:srgbClr val="FFF3E8"/>
-          </a:solidFill>
-          <a:ln w="12700">
-            <a:solidFill>
-              <a:srgbClr val="FEDF89"/>
-            </a:solidFill>
-            <a:prstDash val="solid"/>
-          </a:ln>
-        </p:spPr>
-        <p:txBody>
-          <a:bodyPr/>
-          <a:lstStyle/>
-          <a:p>
-            <a:endParaRPr lang="en-IN"/>
-          </a:p>
-        </p:txBody>
-      </p:sp>
-      <p:sp>
-        <p:nvSpPr>
-          <p:cNvPr id="8" name="Text 6"/>
-          <p:cNvSpPr/>
-          <p:nvPr/>
-        </p:nvSpPr>
-        <p:spPr>
-          <a:xfrm>
-            <a:off x="1010412" y="2212848"/>
-            <a:ext cx="10012680" cy="649224"/>
-          </a:xfrm>
-          <a:prstGeom prst="rect">
-            <a:avLst/>
-          </a:prstGeom>
-          <a:noFill/>
-          <a:ln/>
-        </p:spPr>
-        <p:txBody>
-          <a:bodyPr wrap="square" lIns="0" tIns="0" rIns="0" bIns="0" rtlCol="0" anchor="ctr">
-            <a:normAutofit/>
-          </a:bodyPr>
-          <a:lstStyle/>
-          <a:p>
-            <a:pPr marL="0" indent="0" algn="ctr">
-              <a:buNone/>
-            </a:pPr>
-            <a:r>
-              <a:rPr lang="en-US" b="1" dirty="0">
-                <a:solidFill>
-                  <a:srgbClr val="0B1F35"/>
-                </a:solidFill>
-                <a:latin typeface="Times New Roman" pitchFamily="34" charset="0"/>
-                <a:ea typeface="Times New Roman" pitchFamily="34" charset="-122"/>
-                <a:cs typeface="Times New Roman" pitchFamily="34" charset="-120"/>
-              </a:rPr>
-              <a:t>Problem: A library wants to manage books with ID, title, author and availability status.</a:t>
-            </a:r>
-            <a:endParaRPr lang="en-US" dirty="0"/>
-          </a:p>
-        </p:txBody>
-      </p:sp>
-      <p:sp>
-        <p:nvSpPr>
-          <p:cNvPr id="9" name="Text 7"/>
-          <p:cNvSpPr/>
-          <p:nvPr/>
-        </p:nvSpPr>
-        <p:spPr>
-          <a:xfrm>
-            <a:off x="1143000" y="3392424"/>
-            <a:ext cx="5120640" cy="1828800"/>
-          </a:xfrm>
-          <a:prstGeom prst="rect">
-            <a:avLst/>
-          </a:prstGeom>
-          <a:noFill/>
-          <a:ln/>
-        </p:spPr>
-        <p:txBody>
-          <a:bodyPr wrap="square" lIns="762" tIns="762" rIns="762" bIns="762" rtlCol="0" anchor="ctr">
-            <a:normAutofit/>
-          </a:bodyPr>
-          <a:lstStyle/>
-          <a:p>
-            <a:pPr marL="0" indent="0">
-              <a:buNone/>
-            </a:pPr>
-            <a:r>
-              <a:rPr lang="en-US" sz="2000" dirty="0">
-                <a:solidFill>
-                  <a:srgbClr val="101828"/>
-                </a:solidFill>
-                <a:latin typeface="Times New Roman" pitchFamily="34" charset="0"/>
-                <a:ea typeface="Times New Roman" pitchFamily="34" charset="-122"/>
-                <a:cs typeface="Times New Roman" pitchFamily="34" charset="-120"/>
-              </a:rPr>
-              <a:t>• What data will the ADT store?</a:t>
-            </a:r>
-            <a:endParaRPr lang="en-US" sz="2000" dirty="0"/>
-          </a:p>
-          <a:p>
-            <a:pPr marL="0" indent="0">
-              <a:buNone/>
-            </a:pPr>
-            <a:r>
-              <a:rPr lang="en-US" sz="2000" dirty="0">
-                <a:solidFill>
-                  <a:srgbClr val="101828"/>
-                </a:solidFill>
-                <a:latin typeface="Times New Roman" pitchFamily="34" charset="0"/>
-                <a:ea typeface="Times New Roman" pitchFamily="34" charset="-122"/>
-                <a:cs typeface="Times New Roman" pitchFamily="34" charset="-120"/>
-              </a:rPr>
-              <a:t>• Which operations are required?</a:t>
-            </a:r>
-            <a:endParaRPr lang="en-US" sz="2000" dirty="0"/>
-          </a:p>
-          <a:p>
-            <a:pPr marL="0" indent="0">
-              <a:buNone/>
-            </a:pPr>
-            <a:r>
-              <a:rPr lang="en-US" sz="2000" dirty="0">
-                <a:solidFill>
-                  <a:srgbClr val="101828"/>
-                </a:solidFill>
-                <a:latin typeface="Times New Roman" pitchFamily="34" charset="0"/>
-                <a:ea typeface="Times New Roman" pitchFamily="34" charset="-122"/>
-                <a:cs typeface="Times New Roman" pitchFamily="34" charset="-120"/>
-              </a:rPr>
-              <a:t>• Which operation should be rejected as invalid?</a:t>
-            </a:r>
-            <a:endParaRPr lang="en-US" sz="2000" dirty="0"/>
-          </a:p>
-          <a:p>
-            <a:pPr marL="0" indent="0">
-              <a:buNone/>
-            </a:pPr>
-            <a:r>
-              <a:rPr lang="en-US" sz="2000" dirty="0">
-                <a:solidFill>
-                  <a:srgbClr val="101828"/>
-                </a:solidFill>
-                <a:latin typeface="Times New Roman" pitchFamily="34" charset="0"/>
-                <a:ea typeface="Times New Roman" pitchFamily="34" charset="-122"/>
-                <a:cs typeface="Times New Roman" pitchFamily="34" charset="-120"/>
-              </a:rPr>
-              <a:t>• Which implementation may be suitable?</a:t>
-            </a:r>
-            <a:endParaRPr lang="en-US" sz="2000" dirty="0"/>
-          </a:p>
-        </p:txBody>
-      </p:sp>
-      <p:sp>
-        <p:nvSpPr>
-          <p:cNvPr id="10" name="Shape 8"/>
-          <p:cNvSpPr/>
-          <p:nvPr/>
-        </p:nvSpPr>
-        <p:spPr>
-          <a:xfrm>
-            <a:off x="6766560" y="3483864"/>
-            <a:ext cx="4114800" cy="1371600"/>
-          </a:xfrm>
-          <a:prstGeom prst="roundRect">
-            <a:avLst>
-              <a:gd name="adj" fmla="val 4000"/>
-            </a:avLst>
-          </a:prstGeom>
-          <a:solidFill>
-            <a:srgbClr val="EAFBF2"/>
-          </a:solidFill>
-          <a:ln w="12700">
-            <a:solidFill>
-              <a:srgbClr val="75E0A7"/>
-            </a:solidFill>
-            <a:prstDash val="solid"/>
-          </a:ln>
-        </p:spPr>
-        <p:txBody>
-          <a:bodyPr/>
-          <a:lstStyle/>
-          <a:p>
-            <a:endParaRPr lang="en-IN"/>
-          </a:p>
-        </p:txBody>
-      </p:sp>
-      <p:sp>
-        <p:nvSpPr>
-          <p:cNvPr id="11" name="Text 9"/>
-          <p:cNvSpPr/>
-          <p:nvPr/>
-        </p:nvSpPr>
-        <p:spPr>
-          <a:xfrm>
-            <a:off x="6903720" y="3584448"/>
-            <a:ext cx="3840480" cy="1170432"/>
-          </a:xfrm>
-          <a:prstGeom prst="rect">
-            <a:avLst/>
-          </a:prstGeom>
-          <a:noFill/>
-          <a:ln/>
-        </p:spPr>
-        <p:txBody>
-          <a:bodyPr wrap="square" lIns="381" tIns="381" rIns="381" bIns="381" rtlCol="0" anchor="ctr">
-            <a:normAutofit/>
-          </a:bodyPr>
-          <a:lstStyle/>
-          <a:p>
-            <a:pPr marL="0" indent="0" algn="ctr">
-              <a:buNone/>
-            </a:pPr>
-            <a:r>
-              <a:rPr lang="en-US" sz="2000" b="1" dirty="0">
-                <a:solidFill>
-                  <a:srgbClr val="15803D"/>
-                </a:solidFill>
-                <a:latin typeface="Times New Roman" pitchFamily="34" charset="0"/>
-                <a:ea typeface="Times New Roman" pitchFamily="34" charset="-122"/>
-                <a:cs typeface="Times New Roman" pitchFamily="34" charset="-120"/>
-              </a:rPr>
-              <a:t>Expected operations:</a:t>
-            </a:r>
-            <a:endParaRPr lang="en-US" sz="2000" dirty="0"/>
-          </a:p>
-          <a:p>
-            <a:pPr marL="0" indent="0" algn="ctr">
-              <a:buNone/>
-            </a:pPr>
-            <a:r>
-              <a:rPr lang="en-US" sz="2000" b="1" dirty="0">
-                <a:solidFill>
-                  <a:srgbClr val="15803D"/>
-                </a:solidFill>
-                <a:latin typeface="Times New Roman" pitchFamily="34" charset="0"/>
-                <a:ea typeface="Times New Roman" pitchFamily="34" charset="-122"/>
-                <a:cs typeface="Times New Roman" pitchFamily="34" charset="-120"/>
-              </a:rPr>
-              <a:t>addBook(), searchBook(),</a:t>
-            </a:r>
-            <a:endParaRPr lang="en-US" sz="2000" dirty="0"/>
-          </a:p>
-          <a:p>
-            <a:pPr marL="0" indent="0" algn="ctr">
-              <a:buNone/>
-            </a:pPr>
-            <a:r>
-              <a:rPr lang="en-US" sz="2000" b="1" dirty="0">
-                <a:solidFill>
-                  <a:srgbClr val="15803D"/>
-                </a:solidFill>
-                <a:latin typeface="Times New Roman" pitchFamily="34" charset="0"/>
-                <a:ea typeface="Times New Roman" pitchFamily="34" charset="-122"/>
-                <a:cs typeface="Times New Roman" pitchFamily="34" charset="-120"/>
-              </a:rPr>
-              <a:t>issueBook(), returnBook()</a:t>
-            </a:r>
-            <a:endParaRPr lang="en-US" sz="2000" dirty="0"/>
-          </a:p>
-        </p:txBody>
-      </p:sp>
-      <p:sp>
-        <p:nvSpPr>
-          <p:cNvPr id="12" name="Shape 10"/>
-          <p:cNvSpPr/>
-          <p:nvPr/>
-        </p:nvSpPr>
-        <p:spPr>
-          <a:xfrm>
-            <a:off x="411480" y="6574536"/>
-            <a:ext cx="11384280" cy="0"/>
-          </a:xfrm>
-          <a:prstGeom prst="line">
-            <a:avLst/>
-          </a:prstGeom>
-          <a:noFill/>
-          <a:ln w="10160">
-            <a:solidFill>
-              <a:srgbClr val="D0D5DD"/>
-            </a:solidFill>
-            <a:prstDash val="solid"/>
-          </a:ln>
-        </p:spPr>
-        <p:txBody>
-          <a:bodyPr/>
-          <a:lstStyle/>
-          <a:p>
-            <a:endParaRPr lang="en-IN"/>
-          </a:p>
-        </p:txBody>
-      </p:sp>
-      <p:sp>
-        <p:nvSpPr>
-          <p:cNvPr id="13" name="Text 11"/>
-          <p:cNvSpPr/>
-          <p:nvPr/>
-        </p:nvSpPr>
-        <p:spPr>
-          <a:xfrm>
-            <a:off x="457200" y="6574536"/>
-            <a:ext cx="11247120" cy="228600"/>
-          </a:xfrm>
-          <a:prstGeom prst="rect">
-            <a:avLst/>
-          </a:prstGeom>
-          <a:noFill/>
-          <a:ln/>
-        </p:spPr>
-        <p:txBody>
-          <a:bodyPr wrap="square" lIns="0" tIns="0" rIns="0" bIns="0" rtlCol="0" anchor="ctr">
-            <a:normAutofit lnSpcReduction="10000"/>
-          </a:bodyPr>
-          <a:lstStyle/>
-          <a:p>
-            <a:pPr marL="0" indent="0">
-              <a:buNone/>
-            </a:pPr>
-            <a:r>
-              <a:rPr lang="en-US" sz="1600" i="1" dirty="0">
-                <a:solidFill>
-                  <a:srgbClr val="475467"/>
-                </a:solidFill>
-                <a:latin typeface="Times New Roman" pitchFamily="34" charset="0"/>
-                <a:ea typeface="Times New Roman" pitchFamily="34" charset="-122"/>
-                <a:cs typeface="Times New Roman" pitchFamily="34" charset="-120"/>
-              </a:rPr>
-              <a:t>Teaching cue: Give students 3 minutes, then take two answers.</a:t>
-            </a:r>
-            <a:endParaRPr lang="en-US" sz="1600" dirty="0"/>
-          </a:p>
-        </p:txBody>
-      </p:sp>
-    </p:spTree>
-  </p:cSld>
-  <p:clrMapOvr>
-    <a:masterClrMapping/>
-  </p:clrMapOvr>
-</p:sld>
-</file>
-
-<file path=ppt/slides/slide16.xml><?xml version="1.0" encoding="utf-8"?>
-<p:sld xmlns:a="http://schemas.openxmlformats.org/drawingml/2006/main" xmlns:r="http://schemas.openxmlformats.org/officeDocument/2006/relationships" xmlns:p="http://schemas.openxmlformats.org/presentationml/2006/main">
-  <p:cSld name="Slide 16">
-    <p:spTree>
-      <p:nvGrpSpPr>
-        <p:cNvPr id="1" name=""/>
-        <p:cNvGrpSpPr/>
-        <p:nvPr/>
-      </p:nvGrpSpPr>
-      <p:grpSpPr>
-        <a:xfrm>
-          <a:off x="0" y="0"/>
-          <a:ext cx="0" cy="0"/>
-          <a:chOff x="0" y="0"/>
-          <a:chExt cx="0" cy="0"/>
-        </a:xfrm>
-      </p:grpSpPr>
-      <p:sp>
-        <p:nvSpPr>
-          <p:cNvPr id="2" name="Shape 0"/>
-          <p:cNvSpPr/>
-          <p:nvPr/>
-        </p:nvSpPr>
-        <p:spPr>
-          <a:xfrm>
-            <a:off x="0" y="0"/>
-            <a:ext cx="12191695" cy="457200"/>
-          </a:xfrm>
-          <a:prstGeom prst="rect">
-            <a:avLst/>
-          </a:prstGeom>
-          <a:solidFill>
-            <a:srgbClr val="0B1F35"/>
-          </a:solidFill>
-          <a:ln w="12700">
-            <a:solidFill>
-              <a:srgbClr val="0B1F35">
-                <a:alpha val="0"/>
-              </a:srgbClr>
-            </a:solidFill>
-            <a:prstDash val="solid"/>
-          </a:ln>
-        </p:spPr>
-        <p:txBody>
-          <a:bodyPr/>
-          <a:lstStyle/>
-          <a:p>
-            <a:endParaRPr lang="en-IN"/>
-          </a:p>
-        </p:txBody>
-      </p:sp>
-      <p:sp>
-        <p:nvSpPr>
-          <p:cNvPr id="3" name="Text 1"/>
-          <p:cNvSpPr/>
-          <p:nvPr/>
-        </p:nvSpPr>
-        <p:spPr>
-          <a:xfrm>
-            <a:off x="228600" y="100584"/>
-            <a:ext cx="4754880" cy="228600"/>
-          </a:xfrm>
-          <a:prstGeom prst="rect">
-            <a:avLst/>
-          </a:prstGeom>
-          <a:noFill/>
-          <a:ln/>
-        </p:spPr>
-        <p:txBody>
-          <a:bodyPr wrap="square" lIns="0" tIns="0" rIns="0" bIns="0" rtlCol="0" anchor="ctr"/>
-          <a:lstStyle/>
-          <a:p>
-            <a:pPr marL="0" indent="0">
-              <a:buNone/>
-            </a:pPr>
-            <a:r>
-              <a:rPr lang="en-US" sz="1600" b="1" dirty="0">
-                <a:solidFill>
-                  <a:srgbClr val="FFFFFF"/>
-                </a:solidFill>
-                <a:latin typeface="Times New Roman" pitchFamily="34" charset="0"/>
-                <a:ea typeface="Times New Roman" pitchFamily="34" charset="-122"/>
-                <a:cs typeface="Times New Roman" pitchFamily="34" charset="-120"/>
-              </a:rPr>
-              <a:t>TCS302: Data Structures with C</a:t>
-            </a:r>
-            <a:endParaRPr lang="en-US" sz="1600" dirty="0"/>
-          </a:p>
-        </p:txBody>
-      </p:sp>
-      <p:sp>
-        <p:nvSpPr>
-          <p:cNvPr id="4" name="Text 2"/>
-          <p:cNvSpPr/>
-          <p:nvPr/>
-        </p:nvSpPr>
-        <p:spPr>
-          <a:xfrm>
-            <a:off x="8686800" y="100584"/>
-            <a:ext cx="3246120" cy="228600"/>
-          </a:xfrm>
-          <a:prstGeom prst="rect">
-            <a:avLst/>
-          </a:prstGeom>
-          <a:noFill/>
-          <a:ln/>
-        </p:spPr>
-        <p:txBody>
-          <a:bodyPr wrap="square" lIns="0" tIns="0" rIns="0" bIns="0" rtlCol="0" anchor="ctr"/>
-          <a:lstStyle/>
-          <a:p>
-            <a:pPr marL="0" indent="0" algn="r">
-              <a:buNone/>
-            </a:pPr>
-            <a:r>
-              <a:rPr lang="en-US" sz="1600" b="1" dirty="0">
-                <a:solidFill>
-                  <a:srgbClr val="FFFFFF"/>
-                </a:solidFill>
-                <a:latin typeface="Times New Roman" pitchFamily="34" charset="0"/>
-                <a:ea typeface="Times New Roman" pitchFamily="34" charset="-122"/>
-                <a:cs typeface="Times New Roman" pitchFamily="34" charset="-120"/>
-              </a:rPr>
-              <a:t>Unit 1 | Lecture 2</a:t>
-            </a:r>
-            <a:endParaRPr lang="en-US" sz="1600" dirty="0"/>
-          </a:p>
-        </p:txBody>
-      </p:sp>
-      <p:sp>
-        <p:nvSpPr>
-          <p:cNvPr id="5" name="Text 3"/>
-          <p:cNvSpPr/>
-          <p:nvPr/>
-        </p:nvSpPr>
-        <p:spPr>
-          <a:xfrm>
-            <a:off x="502920" y="713232"/>
-            <a:ext cx="11155680" cy="438912"/>
-          </a:xfrm>
-          <a:prstGeom prst="rect">
-            <a:avLst/>
-          </a:prstGeom>
-          <a:noFill/>
-          <a:ln/>
-        </p:spPr>
-        <p:txBody>
-          <a:bodyPr wrap="square" lIns="0" tIns="0" rIns="0" bIns="0" rtlCol="0" anchor="ctr">
-            <a:normAutofit lnSpcReduction="10000"/>
-          </a:bodyPr>
-          <a:lstStyle/>
-          <a:p>
-            <a:pPr marL="0" indent="0">
-              <a:buNone/>
-            </a:pPr>
-            <a:r>
-              <a:rPr lang="en-US" sz="3200" b="1" dirty="0">
-                <a:solidFill>
-                  <a:srgbClr val="0B1F35"/>
-                </a:solidFill>
-                <a:latin typeface="Times New Roman" pitchFamily="34" charset="0"/>
-                <a:ea typeface="Times New Roman" pitchFamily="34" charset="-122"/>
-                <a:cs typeface="Times New Roman" pitchFamily="34" charset="-120"/>
-              </a:rPr>
-              <a:t>Recap and Exit Questions</a:t>
-            </a:r>
-            <a:endParaRPr lang="en-US" sz="3200" dirty="0"/>
-          </a:p>
-        </p:txBody>
-      </p:sp>
-      <p:sp>
-        <p:nvSpPr>
-          <p:cNvPr id="6" name="Text 4"/>
-          <p:cNvSpPr/>
-          <p:nvPr/>
-        </p:nvSpPr>
-        <p:spPr>
-          <a:xfrm>
-            <a:off x="530352" y="1225296"/>
-            <a:ext cx="10972800" cy="320040"/>
-          </a:xfrm>
-          <a:prstGeom prst="rect">
-            <a:avLst/>
-          </a:prstGeom>
-          <a:noFill/>
-          <a:ln/>
-        </p:spPr>
-        <p:txBody>
-          <a:bodyPr wrap="square" lIns="0" tIns="0" rIns="0" bIns="0" rtlCol="0" anchor="ctr">
-            <a:normAutofit/>
-          </a:bodyPr>
-          <a:lstStyle/>
-          <a:p>
-            <a:pPr marL="0" indent="0">
-              <a:buNone/>
-            </a:pPr>
-            <a:r>
-              <a:rPr lang="en-US" sz="2000" dirty="0">
-                <a:solidFill>
-                  <a:srgbClr val="475467"/>
-                </a:solidFill>
-                <a:latin typeface="Times New Roman" pitchFamily="34" charset="0"/>
-                <a:ea typeface="Times New Roman" pitchFamily="34" charset="-122"/>
-                <a:cs typeface="Times New Roman" pitchFamily="34" charset="-120"/>
-              </a:rPr>
-              <a:t>Close the lecture with quick oral or written responses.</a:t>
-            </a:r>
-            <a:endParaRPr lang="en-US" sz="2000" dirty="0"/>
-          </a:p>
-        </p:txBody>
-      </p:sp>
-      <p:sp>
-        <p:nvSpPr>
-          <p:cNvPr id="7" name="Shape 5"/>
-          <p:cNvSpPr/>
-          <p:nvPr/>
-        </p:nvSpPr>
-        <p:spPr>
-          <a:xfrm>
-            <a:off x="822960" y="2176272"/>
-            <a:ext cx="5166360" cy="548640"/>
-          </a:xfrm>
-          <a:prstGeom prst="roundRect">
-            <a:avLst>
-              <a:gd name="adj" fmla="val 10000"/>
-            </a:avLst>
-          </a:prstGeom>
-          <a:solidFill>
-            <a:srgbClr val="EAF3FF"/>
-          </a:solidFill>
-          <a:ln w="12700">
-            <a:solidFill>
-              <a:srgbClr val="84CAFF"/>
-            </a:solidFill>
-            <a:prstDash val="solid"/>
-          </a:ln>
-        </p:spPr>
-        <p:txBody>
-          <a:bodyPr/>
-          <a:lstStyle/>
-          <a:p>
-            <a:endParaRPr lang="en-IN"/>
-          </a:p>
-        </p:txBody>
-      </p:sp>
-      <p:sp>
-        <p:nvSpPr>
-          <p:cNvPr id="8" name="Text 6"/>
-          <p:cNvSpPr/>
-          <p:nvPr/>
-        </p:nvSpPr>
-        <p:spPr>
-          <a:xfrm>
-            <a:off x="960120" y="2276856"/>
-            <a:ext cx="4892040" cy="347472"/>
-          </a:xfrm>
-          <a:prstGeom prst="rect">
-            <a:avLst/>
-          </a:prstGeom>
-          <a:noFill/>
-          <a:ln/>
-        </p:spPr>
-        <p:txBody>
-          <a:bodyPr wrap="square" lIns="381" tIns="381" rIns="381" bIns="381" rtlCol="0" anchor="ctr">
-            <a:normAutofit/>
-          </a:bodyPr>
-          <a:lstStyle/>
-          <a:p>
-            <a:pPr marL="0" indent="0" algn="ctr">
-              <a:buNone/>
-            </a:pPr>
-            <a:r>
-              <a:rPr lang="en-US" sz="2000" b="1" dirty="0">
-                <a:solidFill>
-                  <a:srgbClr val="101828"/>
-                </a:solidFill>
-                <a:latin typeface="Times New Roman" pitchFamily="34" charset="0"/>
-                <a:ea typeface="Times New Roman" pitchFamily="34" charset="-122"/>
-                <a:cs typeface="Times New Roman" pitchFamily="34" charset="-120"/>
-              </a:rPr>
-              <a:t>Today’s Recap</a:t>
-            </a:r>
-            <a:endParaRPr lang="en-US" sz="2000" dirty="0"/>
-          </a:p>
-        </p:txBody>
-      </p:sp>
-      <p:sp>
-        <p:nvSpPr>
-          <p:cNvPr id="9" name="Text 7"/>
-          <p:cNvSpPr/>
-          <p:nvPr/>
-        </p:nvSpPr>
-        <p:spPr>
-          <a:xfrm>
-            <a:off x="960120" y="3044952"/>
-            <a:ext cx="4800600" cy="1645920"/>
-          </a:xfrm>
-          <a:prstGeom prst="rect">
-            <a:avLst/>
-          </a:prstGeom>
-          <a:noFill/>
-          <a:ln/>
-        </p:spPr>
-        <p:txBody>
-          <a:bodyPr wrap="square" lIns="762" tIns="762" rIns="762" bIns="762" rtlCol="0" anchor="ctr">
-            <a:normAutofit/>
-          </a:bodyPr>
-          <a:lstStyle/>
-          <a:p>
-            <a:pPr marL="0" indent="0">
-              <a:buNone/>
-            </a:pPr>
-            <a:r>
-              <a:rPr lang="en-US" sz="2000" dirty="0">
-                <a:solidFill>
-                  <a:srgbClr val="101828"/>
-                </a:solidFill>
-                <a:latin typeface="Times New Roman" pitchFamily="34" charset="0"/>
-                <a:ea typeface="Times New Roman" pitchFamily="34" charset="-122"/>
-                <a:cs typeface="Times New Roman" pitchFamily="34" charset="-120"/>
-              </a:rPr>
-              <a:t>• Operations make data structures useful.</a:t>
-            </a:r>
-            <a:endParaRPr lang="en-US" sz="2000" dirty="0"/>
-          </a:p>
-          <a:p>
-            <a:pPr marL="0" indent="0">
-              <a:buNone/>
-            </a:pPr>
-            <a:r>
-              <a:rPr lang="en-US" sz="2000" dirty="0">
-                <a:solidFill>
-                  <a:srgbClr val="101828"/>
-                </a:solidFill>
-                <a:latin typeface="Times New Roman" pitchFamily="34" charset="0"/>
-                <a:ea typeface="Times New Roman" pitchFamily="34" charset="-122"/>
-                <a:cs typeface="Times New Roman" pitchFamily="34" charset="-120"/>
-              </a:rPr>
-              <a:t>• ADT hides implementation details.</a:t>
-            </a:r>
-            <a:endParaRPr lang="en-US" sz="2000" dirty="0"/>
-          </a:p>
-          <a:p>
-            <a:pPr marL="0" indent="0">
-              <a:buNone/>
-            </a:pPr>
-            <a:r>
-              <a:rPr lang="en-US" sz="2000" dirty="0">
-                <a:solidFill>
-                  <a:srgbClr val="101828"/>
-                </a:solidFill>
-                <a:latin typeface="Times New Roman" pitchFamily="34" charset="0"/>
-                <a:ea typeface="Times New Roman" pitchFamily="34" charset="-122"/>
-                <a:cs typeface="Times New Roman" pitchFamily="34" charset="-120"/>
-              </a:rPr>
-              <a:t>• C uses structs and functions to support ADT thinking.</a:t>
-            </a:r>
-            <a:endParaRPr lang="en-US" sz="2000" dirty="0"/>
-          </a:p>
-        </p:txBody>
-      </p:sp>
-      <p:sp>
-        <p:nvSpPr>
-          <p:cNvPr id="10" name="Shape 8"/>
-          <p:cNvSpPr/>
-          <p:nvPr/>
-        </p:nvSpPr>
-        <p:spPr>
-          <a:xfrm>
-            <a:off x="6355080" y="2176272"/>
-            <a:ext cx="5074920" cy="548640"/>
-          </a:xfrm>
-          <a:prstGeom prst="roundRect">
-            <a:avLst>
-              <a:gd name="adj" fmla="val 10000"/>
-            </a:avLst>
-          </a:prstGeom>
-          <a:solidFill>
-            <a:srgbClr val="FFF8DB"/>
-          </a:solidFill>
-          <a:ln w="12700">
-            <a:solidFill>
-              <a:srgbClr val="F6C343"/>
-            </a:solidFill>
-            <a:prstDash val="solid"/>
-          </a:ln>
-        </p:spPr>
-        <p:txBody>
-          <a:bodyPr/>
-          <a:lstStyle/>
-          <a:p>
-            <a:endParaRPr lang="en-IN"/>
-          </a:p>
-        </p:txBody>
-      </p:sp>
-      <p:sp>
-        <p:nvSpPr>
-          <p:cNvPr id="11" name="Text 9"/>
-          <p:cNvSpPr/>
-          <p:nvPr/>
-        </p:nvSpPr>
-        <p:spPr>
-          <a:xfrm>
-            <a:off x="6492240" y="2276856"/>
-            <a:ext cx="4800600" cy="347472"/>
-          </a:xfrm>
-          <a:prstGeom prst="rect">
-            <a:avLst/>
-          </a:prstGeom>
-          <a:noFill/>
-          <a:ln/>
-        </p:spPr>
-        <p:txBody>
-          <a:bodyPr wrap="square" lIns="381" tIns="381" rIns="381" bIns="381" rtlCol="0" anchor="ctr">
-            <a:normAutofit/>
-          </a:bodyPr>
-          <a:lstStyle/>
-          <a:p>
-            <a:pPr marL="0" indent="0" algn="ctr">
-              <a:buNone/>
-            </a:pPr>
-            <a:r>
-              <a:rPr lang="en-US" sz="2000" b="1" dirty="0">
-                <a:solidFill>
-                  <a:srgbClr val="F97316"/>
-                </a:solidFill>
-                <a:latin typeface="Times New Roman" pitchFamily="34" charset="0"/>
-                <a:ea typeface="Times New Roman" pitchFamily="34" charset="-122"/>
-                <a:cs typeface="Times New Roman" pitchFamily="34" charset="-120"/>
-              </a:rPr>
-              <a:t>Exit Questions</a:t>
-            </a:r>
-            <a:endParaRPr lang="en-US" sz="2000" dirty="0"/>
-          </a:p>
-        </p:txBody>
-      </p:sp>
-      <p:sp>
-        <p:nvSpPr>
-          <p:cNvPr id="12" name="Text 10"/>
-          <p:cNvSpPr/>
-          <p:nvPr/>
-        </p:nvSpPr>
-        <p:spPr>
-          <a:xfrm>
-            <a:off x="6492240" y="3044952"/>
-            <a:ext cx="4663440" cy="1645920"/>
-          </a:xfrm>
-          <a:prstGeom prst="rect">
-            <a:avLst/>
-          </a:prstGeom>
-          <a:noFill/>
-          <a:ln/>
-        </p:spPr>
-        <p:txBody>
-          <a:bodyPr wrap="square" lIns="762" tIns="762" rIns="762" bIns="762" rtlCol="0" anchor="ctr">
-            <a:normAutofit/>
-          </a:bodyPr>
-          <a:lstStyle/>
-          <a:p>
-            <a:pPr marL="0" indent="0">
-              <a:buNone/>
-            </a:pPr>
-            <a:r>
-              <a:rPr lang="en-US" sz="2000" dirty="0">
-                <a:solidFill>
-                  <a:srgbClr val="101828"/>
-                </a:solidFill>
-                <a:latin typeface="Times New Roman" pitchFamily="34" charset="0"/>
-                <a:ea typeface="Times New Roman" pitchFamily="34" charset="-122"/>
-                <a:cs typeface="Times New Roman" pitchFamily="34" charset="-120"/>
-              </a:rPr>
-              <a:t>• Define ADT in one sentence.</a:t>
-            </a:r>
-            <a:endParaRPr lang="en-US" sz="2000" dirty="0"/>
-          </a:p>
-          <a:p>
-            <a:pPr marL="0" indent="0">
-              <a:buNone/>
-            </a:pPr>
-            <a:r>
-              <a:rPr lang="en-US" sz="2000" dirty="0">
-                <a:solidFill>
-                  <a:srgbClr val="101828"/>
-                </a:solidFill>
-                <a:latin typeface="Times New Roman" pitchFamily="34" charset="0"/>
-                <a:ea typeface="Times New Roman" pitchFamily="34" charset="-122"/>
-                <a:cs typeface="Times New Roman" pitchFamily="34" charset="-120"/>
-              </a:rPr>
-              <a:t>• Why is pop invalid on an empty stack?</a:t>
-            </a:r>
-            <a:endParaRPr lang="en-US" sz="2000" dirty="0"/>
-          </a:p>
-          <a:p>
-            <a:pPr marL="0" indent="0">
-              <a:buNone/>
-            </a:pPr>
-            <a:r>
-              <a:rPr lang="en-US" sz="2000" dirty="0">
-                <a:solidFill>
-                  <a:srgbClr val="101828"/>
-                </a:solidFill>
-                <a:latin typeface="Times New Roman" pitchFamily="34" charset="0"/>
-                <a:ea typeface="Times New Roman" pitchFamily="34" charset="-122"/>
-                <a:cs typeface="Times New Roman" pitchFamily="34" charset="-120"/>
-              </a:rPr>
-              <a:t>• Give one real example of update operation.</a:t>
-            </a:r>
-            <a:endParaRPr lang="en-US" sz="2000" dirty="0"/>
-          </a:p>
-        </p:txBody>
-      </p:sp>
-      <p:sp>
-        <p:nvSpPr>
-          <p:cNvPr id="13" name="Shape 11"/>
-          <p:cNvSpPr/>
-          <p:nvPr/>
-        </p:nvSpPr>
-        <p:spPr>
-          <a:xfrm>
-            <a:off x="822960" y="5623560"/>
-            <a:ext cx="10561320" cy="502920"/>
-          </a:xfrm>
-          <a:prstGeom prst="roundRect">
-            <a:avLst>
-              <a:gd name="adj" fmla="val 10909"/>
-            </a:avLst>
-          </a:prstGeom>
-          <a:solidFill>
-            <a:srgbClr val="EAFBF2"/>
-          </a:solidFill>
-          <a:ln w="12700">
-            <a:solidFill>
-              <a:srgbClr val="75E0A7"/>
-            </a:solidFill>
-            <a:prstDash val="solid"/>
-          </a:ln>
-        </p:spPr>
-        <p:txBody>
-          <a:bodyPr/>
-          <a:lstStyle/>
-          <a:p>
-            <a:endParaRPr lang="en-IN"/>
-          </a:p>
-        </p:txBody>
-      </p:sp>
-      <p:sp>
-        <p:nvSpPr>
-          <p:cNvPr id="14" name="Text 12"/>
-          <p:cNvSpPr/>
-          <p:nvPr/>
-        </p:nvSpPr>
-        <p:spPr>
-          <a:xfrm>
-            <a:off x="1051560" y="5751576"/>
-            <a:ext cx="10104120" cy="228600"/>
-          </a:xfrm>
-          <a:prstGeom prst="rect">
-            <a:avLst/>
-          </a:prstGeom>
-          <a:noFill/>
-          <a:ln/>
-        </p:spPr>
-        <p:txBody>
-          <a:bodyPr wrap="square" lIns="0" tIns="0" rIns="0" bIns="0" rtlCol="0" anchor="ctr">
-            <a:normAutofit fontScale="85000" lnSpcReduction="20000"/>
-          </a:bodyPr>
-          <a:lstStyle/>
-          <a:p>
-            <a:pPr marL="0" indent="0" algn="ctr">
-              <a:buNone/>
-            </a:pPr>
-            <a:r>
-              <a:rPr lang="en-US" sz="2000" b="1" dirty="0">
-                <a:solidFill>
-                  <a:srgbClr val="0B1F35"/>
-                </a:solidFill>
-                <a:latin typeface="Times New Roman" pitchFamily="34" charset="0"/>
-                <a:ea typeface="Times New Roman" pitchFamily="34" charset="-122"/>
-                <a:cs typeface="Times New Roman" pitchFamily="34" charset="-120"/>
-              </a:rPr>
-              <a:t>Next Lecture: Pointers, structures and dynamic memory allocation in C</a:t>
-            </a:r>
-            <a:endParaRPr lang="en-US" sz="2000" dirty="0"/>
-          </a:p>
-        </p:txBody>
-      </p:sp>
-      <p:sp>
-        <p:nvSpPr>
-          <p:cNvPr id="15" name="Shape 13"/>
-          <p:cNvSpPr/>
-          <p:nvPr/>
-        </p:nvSpPr>
-        <p:spPr>
-          <a:xfrm>
-            <a:off x="411480" y="6419088"/>
-            <a:ext cx="11384280" cy="0"/>
-          </a:xfrm>
-          <a:prstGeom prst="line">
-            <a:avLst/>
-          </a:prstGeom>
-          <a:noFill/>
-          <a:ln w="10160">
-            <a:solidFill>
-              <a:srgbClr val="D0D5DD"/>
-            </a:solidFill>
-            <a:prstDash val="solid"/>
-          </a:ln>
-        </p:spPr>
-        <p:txBody>
-          <a:bodyPr/>
-          <a:lstStyle/>
-          <a:p>
-            <a:endParaRPr lang="en-IN"/>
-          </a:p>
-        </p:txBody>
-      </p:sp>
-      <p:sp>
-        <p:nvSpPr>
-          <p:cNvPr id="16" name="Text 14"/>
-          <p:cNvSpPr/>
-          <p:nvPr/>
-        </p:nvSpPr>
-        <p:spPr>
-          <a:xfrm>
-            <a:off x="457200" y="6528816"/>
-            <a:ext cx="11247120" cy="228600"/>
-          </a:xfrm>
-          <a:prstGeom prst="rect">
-            <a:avLst/>
-          </a:prstGeom>
-          <a:noFill/>
-          <a:ln/>
-        </p:spPr>
-        <p:txBody>
-          <a:bodyPr wrap="square" lIns="0" tIns="0" rIns="0" bIns="0" rtlCol="0" anchor="ctr">
-            <a:normAutofit lnSpcReduction="10000"/>
-          </a:bodyPr>
-          <a:lstStyle/>
-          <a:p>
-            <a:pPr marL="0" indent="0">
-              <a:buNone/>
-            </a:pPr>
-            <a:r>
-              <a:rPr lang="en-US" sz="1600" i="1" dirty="0">
-                <a:solidFill>
-                  <a:srgbClr val="475467"/>
-                </a:solidFill>
-                <a:latin typeface="Times New Roman" pitchFamily="34" charset="0"/>
-                <a:ea typeface="Times New Roman" pitchFamily="34" charset="-122"/>
-                <a:cs typeface="Times New Roman" pitchFamily="34" charset="-120"/>
-              </a:rPr>
-              <a:t>Teaching cue: Ask students to submit one exit answer before leaving.</a:t>
-            </a:r>
-            <a:endParaRPr lang="en-US" sz="1600" dirty="0"/>
-          </a:p>
-        </p:txBody>
-      </p:sp>
     </p:spTree>
   </p:cSld>
   <p:clrMapOvr>
@@ -8384,47 +6634,6 @@
           </a:p>
         </p:txBody>
       </p:sp>
-      <p:sp>
-        <p:nvSpPr>
-          <p:cNvPr id="17" name="Text 15"/>
-          <p:cNvSpPr/>
-          <p:nvPr/>
-        </p:nvSpPr>
-        <p:spPr>
-          <a:xfrm>
-            <a:off x="457200" y="6528816"/>
-            <a:ext cx="11247120" cy="228600"/>
-          </a:xfrm>
-          <a:prstGeom prst="rect">
-            <a:avLst/>
-          </a:prstGeom>
-          <a:noFill/>
-          <a:ln/>
-        </p:spPr>
-        <p:txBody>
-          <a:bodyPr wrap="square" lIns="0" tIns="0" rIns="0" bIns="0" rtlCol="0" anchor="ctr">
-            <a:normAutofit lnSpcReduction="10000"/>
-          </a:bodyPr>
-          <a:lstStyle/>
-          <a:p>
-            <a:pPr marL="0" indent="0">
-              <a:buNone/>
-            </a:pPr>
-            <a:r>
-              <a:rPr lang="en-US" sz="1600" i="1" dirty="0">
-                <a:solidFill>
-                  <a:srgbClr val="475467"/>
-                </a:solidFill>
-                <a:latin typeface="Times New Roman" pitchFamily="34" charset="0"/>
-                <a:ea typeface="Times New Roman" pitchFamily="34" charset="-122"/>
-                <a:cs typeface="Times New Roman" pitchFamily="34" charset="-120"/>
-              </a:rPr>
-              <a:t>Teaching cue: Ask students to recall one example from Lecture 1.</a:t>
-            </a:r>
-            <a:endParaRPr lang="en-US" sz="1600" dirty="0"/>
-          </a:p>
-        </p:txBody>
-      </p:sp>
     </p:spTree>
   </p:cSld>
   <p:clrMapOvr>
@@ -9094,81 +7303,6 @@
       </p:sp>
       <p:sp>
         <p:nvSpPr>
-          <p:cNvPr id="19" name="Shape 17"/>
-          <p:cNvSpPr/>
-          <p:nvPr/>
-        </p:nvSpPr>
-        <p:spPr>
-          <a:xfrm>
-            <a:off x="822960" y="5623560"/>
-            <a:ext cx="10561320" cy="502920"/>
-          </a:xfrm>
-          <a:prstGeom prst="roundRect">
-            <a:avLst>
-              <a:gd name="adj" fmla="val 10909"/>
-            </a:avLst>
-          </a:prstGeom>
-          <a:solidFill>
-            <a:srgbClr val="EAFBF2"/>
-          </a:solidFill>
-          <a:ln w="12700">
-            <a:solidFill>
-              <a:srgbClr val="75E0A7"/>
-            </a:solidFill>
-            <a:prstDash val="solid"/>
-          </a:ln>
-        </p:spPr>
-        <p:txBody>
-          <a:bodyPr/>
-          <a:lstStyle/>
-          <a:p>
-            <a:endParaRPr lang="en-IN"/>
-          </a:p>
-        </p:txBody>
-      </p:sp>
-      <p:sp>
-        <p:nvSpPr>
-          <p:cNvPr id="20" name="Text 18"/>
-          <p:cNvSpPr/>
-          <p:nvPr/>
-        </p:nvSpPr>
-        <p:spPr>
-          <a:xfrm>
-            <a:off x="1051560" y="5751576"/>
-            <a:ext cx="10104120" cy="228600"/>
-          </a:xfrm>
-          <a:prstGeom prst="rect">
-            <a:avLst/>
-          </a:prstGeom>
-          <a:noFill/>
-          <a:ln/>
-        </p:spPr>
-        <p:txBody>
-          <a:bodyPr wrap="square" lIns="0" tIns="0" rIns="0" bIns="0" rtlCol="0" anchor="ctr">
-            <a:normAutofit fontScale="85000" lnSpcReduction="20000"/>
-          </a:bodyPr>
-          <a:lstStyle/>
-          <a:p>
-            <a:pPr marL="0" indent="0" algn="ctr">
-              <a:buNone/>
-            </a:pPr>
-            <a:r>
-              <a:rPr lang="en-US" sz="2000" b="1" dirty="0">
-                <a:solidFill>
-                  <a:srgbClr val="0B1F35"/>
-                </a:solidFill>
-                <a:latin typeface="Times New Roman" pitchFamily="34" charset="0"/>
-                <a:ea typeface="Times New Roman" pitchFamily="34" charset="-122"/>
-                <a:cs typeface="Times New Roman" pitchFamily="34" charset="-120"/>
-              </a:rPr>
-              <a:t>Class rule: always ask, “Which operation is most important here?”</a:t>
-            </a:r>
-            <a:endParaRPr lang="en-US" sz="2000" dirty="0"/>
-          </a:p>
-        </p:txBody>
-      </p:sp>
-      <p:sp>
-        <p:nvSpPr>
           <p:cNvPr id="21" name="Shape 19"/>
           <p:cNvSpPr/>
           <p:nvPr/>
@@ -9194,47 +7328,6 @@
           <a:lstStyle/>
           <a:p>
             <a:endParaRPr lang="en-IN"/>
-          </a:p>
-        </p:txBody>
-      </p:sp>
-      <p:sp>
-        <p:nvSpPr>
-          <p:cNvPr id="22" name="Text 20"/>
-          <p:cNvSpPr/>
-          <p:nvPr/>
-        </p:nvSpPr>
-        <p:spPr>
-          <a:xfrm>
-            <a:off x="457200" y="6528816"/>
-            <a:ext cx="11247120" cy="228600"/>
-          </a:xfrm>
-          <a:prstGeom prst="rect">
-            <a:avLst/>
-          </a:prstGeom>
-          <a:noFill/>
-          <a:ln/>
-        </p:spPr>
-        <p:txBody>
-          <a:bodyPr wrap="square" lIns="0" tIns="0" rIns="0" bIns="0" rtlCol="0" anchor="ctr">
-            <a:normAutofit lnSpcReduction="10000"/>
-          </a:bodyPr>
-          <a:lstStyle/>
-          <a:p>
-            <a:pPr marL="0" indent="0">
-              <a:buNone/>
-            </a:pPr>
-            <a:r>
-              <a:rPr lang="en-US" sz="1600" i="1" dirty="0">
-                <a:solidFill>
-                  <a:srgbClr val="475467"/>
-                </a:solidFill>
-                <a:latin typeface="Times New Roman" pitchFamily="34" charset="0"/>
-                <a:ea typeface="Times New Roman" pitchFamily="34" charset="-122"/>
-                <a:cs typeface="Times New Roman" pitchFamily="34" charset="-120"/>
-              </a:rPr>
-              <a:t>Teaching cue: Read outcomes as promises to students.</a:t>
-            </a:r>
-            <a:endParaRPr lang="en-US" sz="1600" dirty="0"/>
           </a:p>
         </p:txBody>
       </p:sp>
@@ -10072,47 +8165,6 @@
       </p:sp>
       <p:sp>
         <p:nvSpPr>
-          <p:cNvPr id="23" name="Text 21"/>
-          <p:cNvSpPr/>
-          <p:nvPr/>
-        </p:nvSpPr>
-        <p:spPr>
-          <a:xfrm>
-            <a:off x="457200" y="6528816"/>
-            <a:ext cx="11247120" cy="228600"/>
-          </a:xfrm>
-          <a:prstGeom prst="rect">
-            <a:avLst/>
-          </a:prstGeom>
-          <a:noFill/>
-          <a:ln/>
-        </p:spPr>
-        <p:txBody>
-          <a:bodyPr wrap="square" lIns="0" tIns="0" rIns="0" bIns="0" rtlCol="0" anchor="ctr">
-            <a:normAutofit lnSpcReduction="10000"/>
-          </a:bodyPr>
-          <a:lstStyle/>
-          <a:p>
-            <a:pPr marL="0" indent="0">
-              <a:buNone/>
-            </a:pPr>
-            <a:r>
-              <a:rPr lang="en-US" sz="1600" i="1" dirty="0">
-                <a:solidFill>
-                  <a:srgbClr val="475467"/>
-                </a:solidFill>
-                <a:latin typeface="Times New Roman" pitchFamily="34" charset="0"/>
-                <a:ea typeface="Times New Roman" pitchFamily="34" charset="-122"/>
-                <a:cs typeface="Times New Roman" pitchFamily="34" charset="-120"/>
-              </a:rPr>
-              <a:t>Teaching cue: Ask which operation happens when a student record is corrected.</a:t>
-            </a:r>
-            <a:endParaRPr lang="en-US" sz="1600" dirty="0"/>
-          </a:p>
-        </p:txBody>
-      </p:sp>
-      <p:sp>
-        <p:nvSpPr>
           <p:cNvPr id="26" name="Shape 20"/>
           <p:cNvSpPr/>
           <p:nvPr/>
@@ -10138,47 +8190,6 @@
           <a:lstStyle/>
           <a:p>
             <a:endParaRPr lang="en-IN"/>
-          </a:p>
-        </p:txBody>
-      </p:sp>
-      <p:sp>
-        <p:nvSpPr>
-          <p:cNvPr id="27" name="Text 21"/>
-          <p:cNvSpPr/>
-          <p:nvPr/>
-        </p:nvSpPr>
-        <p:spPr>
-          <a:xfrm>
-            <a:off x="457200" y="6528816"/>
-            <a:ext cx="11247120" cy="228600"/>
-          </a:xfrm>
-          <a:prstGeom prst="rect">
-            <a:avLst/>
-          </a:prstGeom>
-          <a:noFill/>
-          <a:ln/>
-        </p:spPr>
-        <p:txBody>
-          <a:bodyPr wrap="square" lIns="0" tIns="0" rIns="0" bIns="0" rtlCol="0" anchor="ctr">
-            <a:normAutofit lnSpcReduction="10000"/>
-          </a:bodyPr>
-          <a:lstStyle/>
-          <a:p>
-            <a:pPr marL="0" indent="0">
-              <a:buNone/>
-            </a:pPr>
-            <a:r>
-              <a:rPr lang="en-US" sz="1600" i="1" dirty="0">
-                <a:solidFill>
-                  <a:srgbClr val="475467"/>
-                </a:solidFill>
-                <a:latin typeface="Times New Roman" pitchFamily="34" charset="0"/>
-                <a:ea typeface="Times New Roman" pitchFamily="34" charset="-122"/>
-                <a:cs typeface="Times New Roman" pitchFamily="34" charset="-120"/>
-              </a:rPr>
-              <a:t>Teaching cue: Ask which operation happens when a student record is corrected.</a:t>
-            </a:r>
-            <a:endParaRPr lang="en-US" sz="1600" dirty="0"/>
           </a:p>
         </p:txBody>
       </p:sp>
@@ -10946,81 +8957,6 @@
       </p:sp>
       <p:sp>
         <p:nvSpPr>
-          <p:cNvPr id="20" name="Shape 18"/>
-          <p:cNvSpPr/>
-          <p:nvPr/>
-        </p:nvSpPr>
-        <p:spPr>
-          <a:xfrm>
-            <a:off x="822960" y="5650992"/>
-            <a:ext cx="10561320" cy="502920"/>
-          </a:xfrm>
-          <a:prstGeom prst="roundRect">
-            <a:avLst>
-              <a:gd name="adj" fmla="val 10909"/>
-            </a:avLst>
-          </a:prstGeom>
-          <a:solidFill>
-            <a:srgbClr val="FFF8DB"/>
-          </a:solidFill>
-          <a:ln w="12700">
-            <a:solidFill>
-              <a:srgbClr val="F6C343"/>
-            </a:solidFill>
-            <a:prstDash val="solid"/>
-          </a:ln>
-        </p:spPr>
-        <p:txBody>
-          <a:bodyPr/>
-          <a:lstStyle/>
-          <a:p>
-            <a:endParaRPr lang="en-IN"/>
-          </a:p>
-        </p:txBody>
-      </p:sp>
-      <p:sp>
-        <p:nvSpPr>
-          <p:cNvPr id="21" name="Text 19"/>
-          <p:cNvSpPr/>
-          <p:nvPr/>
-        </p:nvSpPr>
-        <p:spPr>
-          <a:xfrm>
-            <a:off x="1051560" y="5779008"/>
-            <a:ext cx="10104120" cy="228600"/>
-          </a:xfrm>
-          <a:prstGeom prst="rect">
-            <a:avLst/>
-          </a:prstGeom>
-          <a:noFill/>
-          <a:ln/>
-        </p:spPr>
-        <p:txBody>
-          <a:bodyPr wrap="square" lIns="0" tIns="0" rIns="0" bIns="0" rtlCol="0" anchor="ctr">
-            <a:normAutofit fontScale="85000" lnSpcReduction="20000"/>
-          </a:bodyPr>
-          <a:lstStyle/>
-          <a:p>
-            <a:pPr marL="0" indent="0" algn="ctr">
-              <a:buNone/>
-            </a:pPr>
-            <a:r>
-              <a:rPr lang="en-US" sz="2000" b="1" dirty="0">
-                <a:solidFill>
-                  <a:srgbClr val="0B1F35"/>
-                </a:solidFill>
-                <a:latin typeface="Times New Roman" pitchFamily="34" charset="0"/>
-                <a:ea typeface="Times New Roman" pitchFamily="34" charset="-122"/>
-                <a:cs typeface="Times New Roman" pitchFamily="34" charset="-120"/>
-              </a:rPr>
-              <a:t>Ask students: What may happen if marks[] is declared but not initialized?</a:t>
-            </a:r>
-            <a:endParaRPr lang="en-US" sz="2000" dirty="0"/>
-          </a:p>
-        </p:txBody>
-      </p:sp>
-      <p:sp>
-        <p:nvSpPr>
           <p:cNvPr id="22" name="Shape 20"/>
           <p:cNvSpPr/>
           <p:nvPr/>
@@ -11046,47 +8982,6 @@
           <a:lstStyle/>
           <a:p>
             <a:endParaRPr lang="en-IN"/>
-          </a:p>
-        </p:txBody>
-      </p:sp>
-      <p:sp>
-        <p:nvSpPr>
-          <p:cNvPr id="23" name="Text 21"/>
-          <p:cNvSpPr/>
-          <p:nvPr/>
-        </p:nvSpPr>
-        <p:spPr>
-          <a:xfrm>
-            <a:off x="457200" y="6528816"/>
-            <a:ext cx="11247120" cy="228600"/>
-          </a:xfrm>
-          <a:prstGeom prst="rect">
-            <a:avLst/>
-          </a:prstGeom>
-          <a:noFill/>
-          <a:ln/>
-        </p:spPr>
-        <p:txBody>
-          <a:bodyPr wrap="square" lIns="0" tIns="0" rIns="0" bIns="0" rtlCol="0" anchor="ctr">
-            <a:normAutofit lnSpcReduction="10000"/>
-          </a:bodyPr>
-          <a:lstStyle/>
-          <a:p>
-            <a:pPr marL="0" indent="0">
-              <a:buNone/>
-            </a:pPr>
-            <a:r>
-              <a:rPr lang="en-US" sz="1600" i="1" dirty="0">
-                <a:solidFill>
-                  <a:srgbClr val="475467"/>
-                </a:solidFill>
-                <a:latin typeface="Times New Roman" pitchFamily="34" charset="0"/>
-                <a:ea typeface="Times New Roman" pitchFamily="34" charset="-122"/>
-                <a:cs typeface="Times New Roman" pitchFamily="34" charset="-120"/>
-              </a:rPr>
-              <a:t>Teaching cue: Connect this with garbage values in C.</a:t>
-            </a:r>
-            <a:endParaRPr lang="en-US" sz="1600" dirty="0"/>
           </a:p>
         </p:txBody>
       </p:sp>
@@ -11490,81 +9385,6 @@
       </p:sp>
       <p:sp>
         <p:nvSpPr>
-          <p:cNvPr id="50" name="Shape 18"/>
-          <p:cNvSpPr/>
-          <p:nvPr/>
-        </p:nvSpPr>
-        <p:spPr>
-          <a:xfrm>
-            <a:off x="822960" y="5650992"/>
-            <a:ext cx="10561320" cy="502920"/>
-          </a:xfrm>
-          <a:prstGeom prst="roundRect">
-            <a:avLst>
-              <a:gd name="adj" fmla="val 10909"/>
-            </a:avLst>
-          </a:prstGeom>
-          <a:solidFill>
-            <a:srgbClr val="FFF8DB"/>
-          </a:solidFill>
-          <a:ln w="12700">
-            <a:solidFill>
-              <a:srgbClr val="F6C343"/>
-            </a:solidFill>
-            <a:prstDash val="solid"/>
-          </a:ln>
-        </p:spPr>
-        <p:txBody>
-          <a:bodyPr/>
-          <a:lstStyle/>
-          <a:p>
-            <a:endParaRPr lang="en-IN"/>
-          </a:p>
-        </p:txBody>
-      </p:sp>
-      <p:sp>
-        <p:nvSpPr>
-          <p:cNvPr id="51" name="Text 19"/>
-          <p:cNvSpPr/>
-          <p:nvPr/>
-        </p:nvSpPr>
-        <p:spPr>
-          <a:xfrm>
-            <a:off x="1051560" y="5779008"/>
-            <a:ext cx="10104120" cy="228600"/>
-          </a:xfrm>
-          <a:prstGeom prst="rect">
-            <a:avLst/>
-          </a:prstGeom>
-          <a:noFill/>
-          <a:ln/>
-        </p:spPr>
-        <p:txBody>
-          <a:bodyPr wrap="square" lIns="0" tIns="0" rIns="0" bIns="0" rtlCol="0" anchor="ctr">
-            <a:normAutofit fontScale="85000" lnSpcReduction="20000"/>
-          </a:bodyPr>
-          <a:lstStyle/>
-          <a:p>
-            <a:pPr marL="0" indent="0" algn="ctr">
-              <a:buNone/>
-            </a:pPr>
-            <a:r>
-              <a:rPr lang="en-US" sz="2000" b="1" dirty="0">
-                <a:solidFill>
-                  <a:srgbClr val="0B1F35"/>
-                </a:solidFill>
-                <a:latin typeface="Times New Roman" pitchFamily="34" charset="0"/>
-                <a:ea typeface="Times New Roman" pitchFamily="34" charset="-122"/>
-                <a:cs typeface="Times New Roman" pitchFamily="34" charset="-120"/>
-              </a:rPr>
-              <a:t>Ask students: What may happen if marks[] is declared but not initialized?</a:t>
-            </a:r>
-            <a:endParaRPr lang="en-US" sz="2000" dirty="0"/>
-          </a:p>
-        </p:txBody>
-      </p:sp>
-      <p:sp>
-        <p:nvSpPr>
           <p:cNvPr id="52" name="Shape 20"/>
           <p:cNvSpPr/>
           <p:nvPr/>
@@ -11590,47 +9410,6 @@
           <a:lstStyle/>
           <a:p>
             <a:endParaRPr lang="en-IN"/>
-          </a:p>
-        </p:txBody>
-      </p:sp>
-      <p:sp>
-        <p:nvSpPr>
-          <p:cNvPr id="53" name="Text 21"/>
-          <p:cNvSpPr/>
-          <p:nvPr/>
-        </p:nvSpPr>
-        <p:spPr>
-          <a:xfrm>
-            <a:off x="457200" y="6528816"/>
-            <a:ext cx="11247120" cy="228600"/>
-          </a:xfrm>
-          <a:prstGeom prst="rect">
-            <a:avLst/>
-          </a:prstGeom>
-          <a:noFill/>
-          <a:ln/>
-        </p:spPr>
-        <p:txBody>
-          <a:bodyPr wrap="square" lIns="0" tIns="0" rIns="0" bIns="0" rtlCol="0" anchor="ctr">
-            <a:normAutofit lnSpcReduction="10000"/>
-          </a:bodyPr>
-          <a:lstStyle/>
-          <a:p>
-            <a:pPr marL="0" indent="0">
-              <a:buNone/>
-            </a:pPr>
-            <a:r>
-              <a:rPr lang="en-US" sz="1600" i="1" dirty="0">
-                <a:solidFill>
-                  <a:srgbClr val="475467"/>
-                </a:solidFill>
-                <a:latin typeface="Times New Roman" pitchFamily="34" charset="0"/>
-                <a:ea typeface="Times New Roman" pitchFamily="34" charset="-122"/>
-                <a:cs typeface="Times New Roman" pitchFamily="34" charset="-120"/>
-              </a:rPr>
-              <a:t>Teaching cue: Connect this with garbage values in C.</a:t>
-            </a:r>
-            <a:endParaRPr lang="en-US" sz="1600" dirty="0"/>
           </a:p>
         </p:txBody>
       </p:sp>
@@ -12499,47 +10278,6 @@
           </a:p>
         </p:txBody>
       </p:sp>
-      <p:sp>
-        <p:nvSpPr>
-          <p:cNvPr id="23" name="Text 21"/>
-          <p:cNvSpPr/>
-          <p:nvPr/>
-        </p:nvSpPr>
-        <p:spPr>
-          <a:xfrm>
-            <a:off x="457200" y="6528816"/>
-            <a:ext cx="11247120" cy="228600"/>
-          </a:xfrm>
-          <a:prstGeom prst="rect">
-            <a:avLst/>
-          </a:prstGeom>
-          <a:noFill/>
-          <a:ln/>
-        </p:spPr>
-        <p:txBody>
-          <a:bodyPr wrap="square" lIns="0" tIns="0" rIns="0" bIns="0" rtlCol="0" anchor="ctr">
-            <a:normAutofit lnSpcReduction="10000"/>
-          </a:bodyPr>
-          <a:lstStyle/>
-          <a:p>
-            <a:pPr marL="0" indent="0">
-              <a:buNone/>
-            </a:pPr>
-            <a:r>
-              <a:rPr lang="en-US" sz="1600" i="1" dirty="0">
-                <a:solidFill>
-                  <a:srgbClr val="475467"/>
-                </a:solidFill>
-                <a:latin typeface="Times New Roman" pitchFamily="34" charset="0"/>
-                <a:ea typeface="Times New Roman" pitchFamily="34" charset="-122"/>
-                <a:cs typeface="Times New Roman" pitchFamily="34" charset="-120"/>
-              </a:rPr>
-              <a:t>Teaching cue: Let students answer before showing O(n).</a:t>
-            </a:r>
-            <a:endParaRPr lang="en-US" sz="1600" dirty="0"/>
-          </a:p>
-        </p:txBody>
-      </p:sp>
     </p:spTree>
   </p:cSld>
   <p:clrMapOvr>
@@ -13352,47 +11090,6 @@
           </a:p>
         </p:txBody>
       </p:sp>
-      <p:sp>
-        <p:nvSpPr>
-          <p:cNvPr id="22" name="Text 20"/>
-          <p:cNvSpPr/>
-          <p:nvPr/>
-        </p:nvSpPr>
-        <p:spPr>
-          <a:xfrm>
-            <a:off x="457200" y="6528816"/>
-            <a:ext cx="11247120" cy="228600"/>
-          </a:xfrm>
-          <a:prstGeom prst="rect">
-            <a:avLst/>
-          </a:prstGeom>
-          <a:noFill/>
-          <a:ln/>
-        </p:spPr>
-        <p:txBody>
-          <a:bodyPr wrap="square" lIns="0" tIns="0" rIns="0" bIns="0" rtlCol="0" anchor="ctr">
-            <a:normAutofit lnSpcReduction="10000"/>
-          </a:bodyPr>
-          <a:lstStyle/>
-          <a:p>
-            <a:pPr marL="0" indent="0">
-              <a:buNone/>
-            </a:pPr>
-            <a:r>
-              <a:rPr lang="en-US" sz="1600" i="1" dirty="0">
-                <a:solidFill>
-                  <a:srgbClr val="475467"/>
-                </a:solidFill>
-                <a:latin typeface="Times New Roman" pitchFamily="34" charset="0"/>
-                <a:ea typeface="Times New Roman" pitchFamily="34" charset="-122"/>
-                <a:cs typeface="Times New Roman" pitchFamily="34" charset="-120"/>
-              </a:rPr>
-              <a:t>Teaching cue: Ask students why binary search cannot be applied directly to unsorted data.</a:t>
-            </a:r>
-            <a:endParaRPr lang="en-US" sz="1600" dirty="0"/>
-          </a:p>
-        </p:txBody>
-      </p:sp>
     </p:spTree>
   </p:cSld>
   <p:clrMapOvr>
@@ -14167,47 +11864,6 @@
           </a:p>
         </p:txBody>
       </p:sp>
-      <p:sp>
-        <p:nvSpPr>
-          <p:cNvPr id="19" name="Text 17"/>
-          <p:cNvSpPr/>
-          <p:nvPr/>
-        </p:nvSpPr>
-        <p:spPr>
-          <a:xfrm>
-            <a:off x="457200" y="6528816"/>
-            <a:ext cx="11247120" cy="228600"/>
-          </a:xfrm>
-          <a:prstGeom prst="rect">
-            <a:avLst/>
-          </a:prstGeom>
-          <a:noFill/>
-          <a:ln/>
-        </p:spPr>
-        <p:txBody>
-          <a:bodyPr wrap="square" lIns="0" tIns="0" rIns="0" bIns="0" rtlCol="0" anchor="ctr">
-            <a:normAutofit lnSpcReduction="10000"/>
-          </a:bodyPr>
-          <a:lstStyle/>
-          <a:p>
-            <a:pPr marL="0" indent="0">
-              <a:buNone/>
-            </a:pPr>
-            <a:r>
-              <a:rPr lang="en-US" sz="1600" i="1" dirty="0">
-                <a:solidFill>
-                  <a:srgbClr val="475467"/>
-                </a:solidFill>
-                <a:latin typeface="Times New Roman" pitchFamily="34" charset="0"/>
-                <a:ea typeface="Times New Roman" pitchFamily="34" charset="-122"/>
-                <a:cs typeface="Times New Roman" pitchFamily="34" charset="-120"/>
-              </a:rPr>
-              <a:t>Teaching cue: Ask students to give one example of each operation from daily life.</a:t>
-            </a:r>
-            <a:endParaRPr lang="en-US" sz="1600" dirty="0"/>
-          </a:p>
-        </p:txBody>
-      </p:sp>
     </p:spTree>
   </p:cSld>
   <p:clrMapOvr>
@@ -15468,47 +13124,6 @@
       </p:sp>
       <p:sp>
         <p:nvSpPr>
-          <p:cNvPr id="34" name="Text 32"/>
-          <p:cNvSpPr/>
-          <p:nvPr/>
-        </p:nvSpPr>
-        <p:spPr>
-          <a:xfrm>
-            <a:off x="457200" y="6528816"/>
-            <a:ext cx="11247120" cy="228600"/>
-          </a:xfrm>
-          <a:prstGeom prst="rect">
-            <a:avLst/>
-          </a:prstGeom>
-          <a:noFill/>
-          <a:ln/>
-        </p:spPr>
-        <p:txBody>
-          <a:bodyPr wrap="square" lIns="0" tIns="0" rIns="0" bIns="0" rtlCol="0" anchor="ctr">
-            <a:normAutofit lnSpcReduction="10000"/>
-          </a:bodyPr>
-          <a:lstStyle/>
-          <a:p>
-            <a:pPr marL="0" indent="0">
-              <a:buNone/>
-            </a:pPr>
-            <a:r>
-              <a:rPr lang="en-US" sz="1600" i="1" dirty="0">
-                <a:solidFill>
-                  <a:srgbClr val="475467"/>
-                </a:solidFill>
-                <a:latin typeface="Times New Roman" pitchFamily="34" charset="0"/>
-                <a:ea typeface="Times New Roman" pitchFamily="34" charset="-122"/>
-                <a:cs typeface="Times New Roman" pitchFamily="34" charset="-120"/>
-              </a:rPr>
-              <a:t>Teaching cue: Relate this with designing a contact list or marks table.</a:t>
-            </a:r>
-            <a:endParaRPr lang="en-US" sz="1600" dirty="0"/>
-          </a:p>
-        </p:txBody>
-      </p:sp>
-      <p:sp>
-        <p:nvSpPr>
           <p:cNvPr id="62" name="Text 8"/>
           <p:cNvSpPr/>
           <p:nvPr/>
@@ -16400,47 +14015,6 @@
           <a:lstStyle/>
           <a:p>
             <a:endParaRPr lang="en-IN"/>
-          </a:p>
-        </p:txBody>
-      </p:sp>
-      <p:sp>
-        <p:nvSpPr>
-          <p:cNvPr id="86" name="Text 32"/>
-          <p:cNvSpPr/>
-          <p:nvPr/>
-        </p:nvSpPr>
-        <p:spPr>
-          <a:xfrm>
-            <a:off x="457200" y="6528816"/>
-            <a:ext cx="11247120" cy="228600"/>
-          </a:xfrm>
-          <a:prstGeom prst="rect">
-            <a:avLst/>
-          </a:prstGeom>
-          <a:noFill/>
-          <a:ln/>
-        </p:spPr>
-        <p:txBody>
-          <a:bodyPr wrap="square" lIns="0" tIns="0" rIns="0" bIns="0" rtlCol="0" anchor="ctr">
-            <a:normAutofit lnSpcReduction="10000"/>
-          </a:bodyPr>
-          <a:lstStyle/>
-          <a:p>
-            <a:pPr marL="0" indent="0">
-              <a:buNone/>
-            </a:pPr>
-            <a:r>
-              <a:rPr lang="en-US" sz="1600" i="1" dirty="0">
-                <a:solidFill>
-                  <a:srgbClr val="475467"/>
-                </a:solidFill>
-                <a:latin typeface="Times New Roman" pitchFamily="34" charset="0"/>
-                <a:ea typeface="Times New Roman" pitchFamily="34" charset="-122"/>
-                <a:cs typeface="Times New Roman" pitchFamily="34" charset="-120"/>
-              </a:rPr>
-              <a:t>Teaching cue: Relate this with designing a contact list or marks table.</a:t>
-            </a:r>
-            <a:endParaRPr lang="en-US" sz="1600" dirty="0"/>
           </a:p>
         </p:txBody>
       </p:sp>
